--- a/docs/RepoPilot_Epchoesque2_PitchDeck_new.pptx
+++ b/docs/RepoPilot_Epchoesque2_PitchDeck_new.pptx
@@ -5,29 +5,29 @@
     <p:sldMasterId id="2147483648" r:id="rId1"/>
   </p:sldMasterIdLst>
   <p:notesMasterIdLst>
-    <p:notesMasterId r:id="rId4"/>
+    <p:notesMasterId r:id="rId8"/>
   </p:notesMasterIdLst>
   <p:sldIdLst>
-    <p:sldId id="256" r:id="rId3"/>
-    <p:sldId id="257" r:id="rId5"/>
-    <p:sldId id="258" r:id="rId6"/>
-    <p:sldId id="259" r:id="rId7"/>
-    <p:sldId id="260" r:id="rId8"/>
-    <p:sldId id="261" r:id="rId9"/>
+    <p:sldId id="256" r:id="rId2"/>
+    <p:sldId id="257" r:id="rId3"/>
+    <p:sldId id="258" r:id="rId4"/>
+    <p:sldId id="259" r:id="rId5"/>
+    <p:sldId id="260" r:id="rId6"/>
+    <p:sldId id="261" r:id="rId7"/>
   </p:sldIdLst>
   <p:sldSz cx="12192000" cy="6858000"/>
   <p:notesSz cx="6858000" cy="9144000"/>
   <p:embeddedFontLst>
     <p:embeddedFont>
-      <p:font typeface="Bebas Neue" panose="020B0606020202050201"/>
-      <p:regular r:id="rId13"/>
+      <p:font typeface="Bebas Neue" panose="020B0606020202050201" pitchFamily="34" charset="0"/>
+      <p:regular r:id="rId9"/>
     </p:embeddedFont>
     <p:embeddedFont>
-      <p:font typeface="Poppins" panose="00000500000000000000"/>
-      <p:regular r:id="rId14"/>
-      <p:bold r:id="rId15"/>
-      <p:italic r:id="rId16"/>
-      <p:boldItalic r:id="rId17"/>
+      <p:font typeface="Poppins" panose="00000500000000000000" pitchFamily="2" charset="0"/>
+      <p:regular r:id="rId10"/>
+      <p:bold r:id="rId11"/>
+      <p:italic r:id="rId12"/>
+      <p:boldItalic r:id="rId13"/>
     </p:embeddedFont>
   </p:embeddedFontLst>
   <p:defaultTextStyle>
@@ -262,6 +262,35 @@
 </p:presentation>
 </file>
 
+<file path=ppt/changesInfos/changesInfo1.xml><?xml version="1.0" encoding="utf-8"?>
+<pc:chgInfo xmlns:a="http://schemas.openxmlformats.org/drawingml/2006/main" xmlns:r="http://schemas.openxmlformats.org/officeDocument/2006/relationships" xmlns:ac="http://schemas.microsoft.com/office/drawing/2013/main/command" xmlns:pc="http://schemas.microsoft.com/office/powerpoint/2013/main/command">
+  <pc:docChgLst>
+    <pc:chgData name="Siddhant Asati" userId="f714eb6b166d2c65" providerId="LiveId" clId="{2F15454B-8AC4-4A74-A40A-4746D4B03782}"/>
+    <pc:docChg chg="modSld">
+      <pc:chgData name="Siddhant Asati" userId="f714eb6b166d2c65" providerId="LiveId" clId="{2F15454B-8AC4-4A74-A40A-4746D4B03782}" dt="2026-09-18T05:43:01.632" v="58" actId="20577"/>
+      <pc:docMkLst>
+        <pc:docMk/>
+      </pc:docMkLst>
+      <pc:sldChg chg="modSp mod">
+        <pc:chgData name="Siddhant Asati" userId="f714eb6b166d2c65" providerId="LiveId" clId="{2F15454B-8AC4-4A74-A40A-4746D4B03782}" dt="2026-09-18T05:43:01.632" v="58" actId="20577"/>
+        <pc:sldMkLst>
+          <pc:docMk/>
+          <pc:sldMk cId="0" sldId="256"/>
+        </pc:sldMkLst>
+        <pc:spChg chg="mod">
+          <ac:chgData name="Siddhant Asati" userId="f714eb6b166d2c65" providerId="LiveId" clId="{2F15454B-8AC4-4A74-A40A-4746D4B03782}" dt="2026-09-18T05:43:01.632" v="58" actId="20577"/>
+          <ac:spMkLst>
+            <pc:docMk/>
+            <pc:sldMk cId="0" sldId="256"/>
+            <ac:spMk id="94" creationId="{00000000-0000-0000-0000-000000000000}"/>
+          </ac:spMkLst>
+        </pc:spChg>
+      </pc:sldChg>
+    </pc:docChg>
+  </pc:docChgLst>
+</pc:chgInfo>
+</file>
+
 <file path=ppt/notesMasters/notesMaster1.xml><?xml version="1.0" encoding="utf-8"?>
 <p:notesMaster xmlns:a="http://schemas.openxmlformats.org/drawingml/2006/main" xmlns:r="http://schemas.openxmlformats.org/officeDocument/2006/relationships" xmlns:p="http://schemas.openxmlformats.org/presentationml/2006/main">
   <p:cSld>
@@ -272,7 +301,7 @@
     </p:bg>
     <p:spTree>
       <p:nvGrpSpPr>
-        <p:cNvPr id="2" name="Shape 2"/>
+        <p:cNvPr id="1" name="Shape 2"/>
         <p:cNvGrpSpPr/>
         <p:nvPr/>
       </p:nvGrpSpPr>
@@ -287,7 +316,9 @@
       <p:sp>
         <p:nvSpPr>
           <p:cNvPr id="3" name="Google Shape;3;n"/>
-          <p:cNvSpPr/>
+          <p:cNvSpPr>
+            <a:spLocks noGrp="1" noRot="1" noChangeAspect="1"/>
+          </p:cNvSpPr>
           <p:nvPr>
             <p:ph type="sldImg" idx="2"/>
           </p:nvPr>
@@ -336,7 +367,9 @@
       <p:sp>
         <p:nvSpPr>
           <p:cNvPr id="4" name="Google Shape;4;n"/>
-          <p:cNvSpPr txBox="1"/>
+          <p:cNvSpPr txBox="1">
+            <a:spLocks noGrp="1"/>
+          </p:cNvSpPr>
           <p:nvPr>
             <p:ph type="body" idx="1"/>
           </p:nvPr>
@@ -459,7 +492,9 @@
               <a:defRPr sz="1100"/>
             </a:lvl9pPr>
           </a:lstStyle>
-          <a:p/>
+          <a:p>
+            <a:endParaRPr/>
+          </a:p>
         </p:txBody>
       </p:sp>
     </p:spTree>
@@ -698,11 +733,11 @@
 </file>
 
 <file path=ppt/notesSlides/notesSlide1.xml><?xml version="1.0" encoding="utf-8"?>
-<p:notes xmlns:a="http://schemas.openxmlformats.org/drawingml/2006/main" xmlns:r="http://schemas.openxmlformats.org/officeDocument/2006/relationships" xmlns:p="http://schemas.openxmlformats.org/presentationml/2006/main" showMasterPhAnim="0" showMasterSp="0">
+<p:notes xmlns:a="http://schemas.openxmlformats.org/drawingml/2006/main" xmlns:r="http://schemas.openxmlformats.org/officeDocument/2006/relationships" xmlns:p="http://schemas.openxmlformats.org/presentationml/2006/main" showMasterSp="0" showMasterPhAnim="0">
   <p:cSld>
     <p:spTree>
       <p:nvGrpSpPr>
-        <p:cNvPr id="83" name="Shape 83"/>
+        <p:cNvPr id="1" name="Shape 83"/>
         <p:cNvGrpSpPr/>
         <p:nvPr/>
       </p:nvGrpSpPr>
@@ -717,7 +752,9 @@
       <p:sp>
         <p:nvSpPr>
           <p:cNvPr id="84" name="Google Shape;84;p1:notes"/>
-          <p:cNvSpPr txBox="1"/>
+          <p:cNvSpPr txBox="1">
+            <a:spLocks noGrp="1"/>
+          </p:cNvSpPr>
           <p:nvPr>
             <p:ph type="body" idx="1"/>
           </p:nvPr>
@@ -746,21 +783,24 @@
               </a:spcAft>
               <a:buNone/>
             </a:pPr>
+            <a:endParaRPr/>
           </a:p>
         </p:txBody>
       </p:sp>
       <p:sp>
         <p:nvSpPr>
           <p:cNvPr id="85" name="Google Shape;85;p1:notes"/>
-          <p:cNvSpPr/>
+          <p:cNvSpPr>
+            <a:spLocks noGrp="1" noRot="1" noChangeAspect="1"/>
+          </p:cNvSpPr>
           <p:nvPr>
             <p:ph type="sldImg" idx="2"/>
           </p:nvPr>
         </p:nvSpPr>
         <p:spPr>
           <a:xfrm>
-            <a:off x="1143225" y="685800"/>
-            <a:ext cx="4572225" cy="3429000"/>
+            <a:off x="381000" y="685800"/>
+            <a:ext cx="6096000" cy="3429000"/>
           </a:xfrm>
           <a:custGeom>
             <a:avLst/>
@@ -797,11 +837,11 @@
 </file>
 
 <file path=ppt/notesSlides/notesSlide2.xml><?xml version="1.0" encoding="utf-8"?>
-<p:notes xmlns:a="http://schemas.openxmlformats.org/drawingml/2006/main" xmlns:r="http://schemas.openxmlformats.org/officeDocument/2006/relationships" xmlns:p="http://schemas.openxmlformats.org/presentationml/2006/main" showMasterPhAnim="0" showMasterSp="0">
+<p:notes xmlns:a="http://schemas.openxmlformats.org/drawingml/2006/main" xmlns:r="http://schemas.openxmlformats.org/officeDocument/2006/relationships" xmlns:p="http://schemas.openxmlformats.org/presentationml/2006/main" showMasterSp="0" showMasterPhAnim="0">
   <p:cSld>
     <p:spTree>
       <p:nvGrpSpPr>
-        <p:cNvPr id="90" name="Shape 90"/>
+        <p:cNvPr id="1" name="Shape 90"/>
         <p:cNvGrpSpPr/>
         <p:nvPr/>
       </p:nvGrpSpPr>
@@ -816,7 +856,9 @@
       <p:sp>
         <p:nvSpPr>
           <p:cNvPr id="91" name="Google Shape;91;p2:notes"/>
-          <p:cNvSpPr txBox="1"/>
+          <p:cNvSpPr txBox="1">
+            <a:spLocks noGrp="1"/>
+          </p:cNvSpPr>
           <p:nvPr>
             <p:ph type="body" idx="1"/>
           </p:nvPr>
@@ -845,13 +887,16 @@
               </a:spcAft>
               <a:buNone/>
             </a:pPr>
+            <a:endParaRPr/>
           </a:p>
         </p:txBody>
       </p:sp>
       <p:sp>
         <p:nvSpPr>
           <p:cNvPr id="92" name="Google Shape;92;p2:notes"/>
-          <p:cNvSpPr/>
+          <p:cNvSpPr>
+            <a:spLocks noGrp="1" noRot="1" noChangeAspect="1"/>
+          </p:cNvSpPr>
           <p:nvPr>
             <p:ph type="sldImg" idx="2"/>
           </p:nvPr>
@@ -896,11 +941,11 @@
 </file>
 
 <file path=ppt/notesSlides/notesSlide3.xml><?xml version="1.0" encoding="utf-8"?>
-<p:notes xmlns:a="http://schemas.openxmlformats.org/drawingml/2006/main" xmlns:r="http://schemas.openxmlformats.org/officeDocument/2006/relationships" xmlns:p="http://schemas.openxmlformats.org/presentationml/2006/main" showMasterPhAnim="0" showMasterSp="0">
+<p:notes xmlns:a="http://schemas.openxmlformats.org/drawingml/2006/main" xmlns:r="http://schemas.openxmlformats.org/officeDocument/2006/relationships" xmlns:p="http://schemas.openxmlformats.org/presentationml/2006/main" showMasterSp="0" showMasterPhAnim="0">
   <p:cSld>
     <p:spTree>
       <p:nvGrpSpPr>
-        <p:cNvPr id="96" name="Shape 96"/>
+        <p:cNvPr id="1" name="Shape 96"/>
         <p:cNvGrpSpPr/>
         <p:nvPr/>
       </p:nvGrpSpPr>
@@ -915,7 +960,9 @@
       <p:sp>
         <p:nvSpPr>
           <p:cNvPr id="97" name="Google Shape;97;p4:notes"/>
-          <p:cNvSpPr txBox="1"/>
+          <p:cNvSpPr txBox="1">
+            <a:spLocks noGrp="1"/>
+          </p:cNvSpPr>
           <p:nvPr>
             <p:ph type="body" idx="1"/>
           </p:nvPr>
@@ -944,13 +991,16 @@
               </a:spcAft>
               <a:buNone/>
             </a:pPr>
+            <a:endParaRPr/>
           </a:p>
         </p:txBody>
       </p:sp>
       <p:sp>
         <p:nvSpPr>
           <p:cNvPr id="98" name="Google Shape;98;p4:notes"/>
-          <p:cNvSpPr/>
+          <p:cNvSpPr>
+            <a:spLocks noGrp="1" noRot="1" noChangeAspect="1"/>
+          </p:cNvSpPr>
           <p:nvPr>
             <p:ph type="sldImg" idx="2"/>
           </p:nvPr>
@@ -995,11 +1045,11 @@
 </file>
 
 <file path=ppt/notesSlides/notesSlide4.xml><?xml version="1.0" encoding="utf-8"?>
-<p:notes xmlns:a="http://schemas.openxmlformats.org/drawingml/2006/main" xmlns:r="http://schemas.openxmlformats.org/officeDocument/2006/relationships" xmlns:p="http://schemas.openxmlformats.org/presentationml/2006/main" showMasterPhAnim="0" showMasterSp="0">
+<p:notes xmlns:a="http://schemas.openxmlformats.org/drawingml/2006/main" xmlns:r="http://schemas.openxmlformats.org/officeDocument/2006/relationships" xmlns:p="http://schemas.openxmlformats.org/presentationml/2006/main" showMasterSp="0" showMasterPhAnim="0">
   <p:cSld>
     <p:spTree>
       <p:nvGrpSpPr>
-        <p:cNvPr id="102" name="Shape 102"/>
+        <p:cNvPr id="1" name="Shape 102"/>
         <p:cNvGrpSpPr/>
         <p:nvPr/>
       </p:nvGrpSpPr>
@@ -1014,7 +1064,9 @@
       <p:sp>
         <p:nvSpPr>
           <p:cNvPr id="103" name="Google Shape;103;p3:notes"/>
-          <p:cNvSpPr txBox="1"/>
+          <p:cNvSpPr txBox="1">
+            <a:spLocks noGrp="1"/>
+          </p:cNvSpPr>
           <p:nvPr>
             <p:ph type="body" idx="1"/>
           </p:nvPr>
@@ -1043,13 +1095,16 @@
               </a:spcAft>
               <a:buNone/>
             </a:pPr>
+            <a:endParaRPr/>
           </a:p>
         </p:txBody>
       </p:sp>
       <p:sp>
         <p:nvSpPr>
           <p:cNvPr id="104" name="Google Shape;104;p3:notes"/>
-          <p:cNvSpPr/>
+          <p:cNvSpPr>
+            <a:spLocks noGrp="1" noRot="1" noChangeAspect="1"/>
+          </p:cNvSpPr>
           <p:nvPr>
             <p:ph type="sldImg" idx="2"/>
           </p:nvPr>
@@ -1094,11 +1149,11 @@
 </file>
 
 <file path=ppt/notesSlides/notesSlide5.xml><?xml version="1.0" encoding="utf-8"?>
-<p:notes xmlns:a="http://schemas.openxmlformats.org/drawingml/2006/main" xmlns:r="http://schemas.openxmlformats.org/officeDocument/2006/relationships" xmlns:p="http://schemas.openxmlformats.org/presentationml/2006/main" showMasterPhAnim="0" showMasterSp="0">
+<p:notes xmlns:a="http://schemas.openxmlformats.org/drawingml/2006/main" xmlns:r="http://schemas.openxmlformats.org/officeDocument/2006/relationships" xmlns:p="http://schemas.openxmlformats.org/presentationml/2006/main" showMasterSp="0" showMasterPhAnim="0">
   <p:cSld>
     <p:spTree>
       <p:nvGrpSpPr>
-        <p:cNvPr id="108" name="Shape 108"/>
+        <p:cNvPr id="1" name="Shape 108"/>
         <p:cNvGrpSpPr/>
         <p:nvPr/>
       </p:nvGrpSpPr>
@@ -1113,7 +1168,9 @@
       <p:sp>
         <p:nvSpPr>
           <p:cNvPr id="109" name="Google Shape;109;p5:notes"/>
-          <p:cNvSpPr txBox="1"/>
+          <p:cNvSpPr txBox="1">
+            <a:spLocks noGrp="1"/>
+          </p:cNvSpPr>
           <p:nvPr>
             <p:ph type="body" idx="1"/>
           </p:nvPr>
@@ -1142,13 +1199,16 @@
               </a:spcAft>
               <a:buNone/>
             </a:pPr>
+            <a:endParaRPr/>
           </a:p>
         </p:txBody>
       </p:sp>
       <p:sp>
         <p:nvSpPr>
           <p:cNvPr id="110" name="Google Shape;110;p5:notes"/>
-          <p:cNvSpPr/>
+          <p:cNvSpPr>
+            <a:spLocks noGrp="1" noRot="1" noChangeAspect="1"/>
+          </p:cNvSpPr>
           <p:nvPr>
             <p:ph type="sldImg" idx="2"/>
           </p:nvPr>
@@ -1193,11 +1253,11 @@
 </file>
 
 <file path=ppt/notesSlides/notesSlide6.xml><?xml version="1.0" encoding="utf-8"?>
-<p:notes xmlns:a="http://schemas.openxmlformats.org/drawingml/2006/main" xmlns:r="http://schemas.openxmlformats.org/officeDocument/2006/relationships" xmlns:p="http://schemas.openxmlformats.org/presentationml/2006/main" showMasterPhAnim="0" showMasterSp="0">
+<p:notes xmlns:a="http://schemas.openxmlformats.org/drawingml/2006/main" xmlns:r="http://schemas.openxmlformats.org/officeDocument/2006/relationships" xmlns:p="http://schemas.openxmlformats.org/presentationml/2006/main" showMasterSp="0" showMasterPhAnim="0">
   <p:cSld>
     <p:spTree>
       <p:nvGrpSpPr>
-        <p:cNvPr id="114" name="Shape 114"/>
+        <p:cNvPr id="1" name="Shape 114"/>
         <p:cNvGrpSpPr/>
         <p:nvPr/>
       </p:nvGrpSpPr>
@@ -1212,7 +1272,9 @@
       <p:sp>
         <p:nvSpPr>
           <p:cNvPr id="115" name="Google Shape;115;p6:notes"/>
-          <p:cNvSpPr txBox="1"/>
+          <p:cNvSpPr txBox="1">
+            <a:spLocks noGrp="1"/>
+          </p:cNvSpPr>
           <p:nvPr>
             <p:ph type="body" idx="1"/>
           </p:nvPr>
@@ -1241,13 +1303,16 @@
               </a:spcAft>
               <a:buNone/>
             </a:pPr>
+            <a:endParaRPr/>
           </a:p>
         </p:txBody>
       </p:sp>
       <p:sp>
         <p:nvSpPr>
           <p:cNvPr id="116" name="Google Shape;116;p6:notes"/>
-          <p:cNvSpPr/>
+          <p:cNvSpPr>
+            <a:spLocks noGrp="1" noRot="1" noChangeAspect="1"/>
+          </p:cNvSpPr>
           <p:nvPr>
             <p:ph type="sldImg" idx="2"/>
           </p:nvPr>
@@ -1292,11 +1357,11 @@
 </file>
 
 <file path=ppt/slideLayouts/slideLayout1.xml><?xml version="1.0" encoding="utf-8"?>
-<p:sldLayout xmlns:a="http://schemas.openxmlformats.org/drawingml/2006/main" xmlns:r="http://schemas.openxmlformats.org/officeDocument/2006/relationships" xmlns:p="http://schemas.openxmlformats.org/presentationml/2006/main" type="title" matchingName="Title Slide">
+<p:sldLayout xmlns:a="http://schemas.openxmlformats.org/drawingml/2006/main" xmlns:r="http://schemas.openxmlformats.org/officeDocument/2006/relationships" xmlns:p="http://schemas.openxmlformats.org/presentationml/2006/main" matchingName="Title Slide" type="title">
   <p:cSld name="TITLE">
     <p:spTree>
       <p:nvGrpSpPr>
-        <p:cNvPr id="14" name="Shape 14"/>
+        <p:cNvPr id="1" name="Shape 14"/>
         <p:cNvGrpSpPr/>
         <p:nvPr/>
       </p:nvGrpSpPr>
@@ -1311,7 +1376,9 @@
       <p:sp>
         <p:nvSpPr>
           <p:cNvPr id="15" name="Google Shape;15;p2"/>
-          <p:cNvSpPr txBox="1"/>
+          <p:cNvSpPr txBox="1">
+            <a:spLocks noGrp="1"/>
+          </p:cNvSpPr>
           <p:nvPr>
             <p:ph type="ctrTitle"/>
           </p:nvPr>
@@ -1445,13 +1512,17 @@
               <a:defRPr/>
             </a:lvl9pPr>
           </a:lstStyle>
-          <a:p/>
+          <a:p>
+            <a:endParaRPr/>
+          </a:p>
         </p:txBody>
       </p:sp>
       <p:sp>
         <p:nvSpPr>
           <p:cNvPr id="16" name="Google Shape;16;p2"/>
-          <p:cNvSpPr txBox="1"/>
+          <p:cNvSpPr txBox="1">
+            <a:spLocks noGrp="1"/>
+          </p:cNvSpPr>
           <p:nvPr>
             <p:ph type="subTitle" idx="1"/>
           </p:nvPr>
@@ -1664,13 +1735,17 @@
               </a:defRPr>
             </a:lvl9pPr>
           </a:lstStyle>
-          <a:p/>
+          <a:p>
+            <a:endParaRPr/>
+          </a:p>
         </p:txBody>
       </p:sp>
       <p:sp>
         <p:nvSpPr>
           <p:cNvPr id="17" name="Google Shape;17;p2"/>
-          <p:cNvSpPr txBox="1"/>
+          <p:cNvSpPr txBox="1">
+            <a:spLocks noGrp="1"/>
+          </p:cNvSpPr>
           <p:nvPr>
             <p:ph type="dt" idx="10"/>
           </p:nvPr>
@@ -1793,13 +1868,17 @@
               <a:defRPr/>
             </a:lvl9pPr>
           </a:lstStyle>
-          <a:p/>
+          <a:p>
+            <a:endParaRPr/>
+          </a:p>
         </p:txBody>
       </p:sp>
       <p:sp>
         <p:nvSpPr>
           <p:cNvPr id="18" name="Google Shape;18;p2"/>
-          <p:cNvSpPr txBox="1"/>
+          <p:cNvSpPr txBox="1">
+            <a:spLocks noGrp="1"/>
+          </p:cNvSpPr>
           <p:nvPr>
             <p:ph type="ftr" idx="11"/>
           </p:nvPr>
@@ -1922,13 +2001,17 @@
               <a:defRPr/>
             </a:lvl9pPr>
           </a:lstStyle>
-          <a:p/>
+          <a:p>
+            <a:endParaRPr/>
+          </a:p>
         </p:txBody>
       </p:sp>
       <p:sp>
         <p:nvSpPr>
           <p:cNvPr id="19" name="Google Shape;19;p2"/>
-          <p:cNvSpPr txBox="1"/>
+          <p:cNvSpPr txBox="1">
+            <a:spLocks noGrp="1"/>
+          </p:cNvSpPr>
           <p:nvPr>
             <p:ph type="sldNum" idx="12"/>
           </p:nvPr>
@@ -2027,6 +2110,7 @@
             </a:pPr>
             <a:fld id="{00000000-1234-1234-1234-123412341234}" type="slidenum">
               <a:rPr lang="en-US"/>
+              <a:t>‹#›</a:t>
             </a:fld>
             <a:endParaRPr lang="en-US"/>
           </a:p>
@@ -2041,11 +2125,11 @@
 </file>
 
 <file path=ppt/slideLayouts/slideLayout10.xml><?xml version="1.0" encoding="utf-8"?>
-<p:sldLayout xmlns:a="http://schemas.openxmlformats.org/drawingml/2006/main" xmlns:r="http://schemas.openxmlformats.org/officeDocument/2006/relationships" xmlns:p="http://schemas.openxmlformats.org/presentationml/2006/main" type="vertTx" matchingName="Title and Vertical Text">
+<p:sldLayout xmlns:a="http://schemas.openxmlformats.org/drawingml/2006/main" xmlns:r="http://schemas.openxmlformats.org/officeDocument/2006/relationships" xmlns:p="http://schemas.openxmlformats.org/presentationml/2006/main" matchingName="Title and Vertical Text" type="vertTx">
   <p:cSld name="VERTICAL_TEXT">
     <p:spTree>
       <p:nvGrpSpPr>
-        <p:cNvPr id="71" name="Shape 71"/>
+        <p:cNvPr id="1" name="Shape 71"/>
         <p:cNvGrpSpPr/>
         <p:nvPr/>
       </p:nvGrpSpPr>
@@ -2060,7 +2144,9 @@
       <p:sp>
         <p:nvSpPr>
           <p:cNvPr id="72" name="Google Shape;72;p11"/>
-          <p:cNvSpPr txBox="1"/>
+          <p:cNvSpPr txBox="1">
+            <a:spLocks noGrp="1"/>
+          </p:cNvSpPr>
           <p:nvPr>
             <p:ph type="title"/>
           </p:nvPr>
@@ -2189,13 +2275,17 @@
               <a:defRPr/>
             </a:lvl9pPr>
           </a:lstStyle>
-          <a:p/>
+          <a:p>
+            <a:endParaRPr/>
+          </a:p>
         </p:txBody>
       </p:sp>
       <p:sp>
         <p:nvSpPr>
           <p:cNvPr id="73" name="Google Shape;73;p11"/>
-          <p:cNvSpPr txBox="1"/>
+          <p:cNvSpPr txBox="1">
+            <a:spLocks noGrp="1"/>
+          </p:cNvSpPr>
           <p:nvPr>
             <p:ph type="body" idx="1"/>
           </p:nvPr>
@@ -2372,13 +2462,17 @@
               <a:defRPr/>
             </a:lvl9pPr>
           </a:lstStyle>
-          <a:p/>
+          <a:p>
+            <a:endParaRPr/>
+          </a:p>
         </p:txBody>
       </p:sp>
       <p:sp>
         <p:nvSpPr>
           <p:cNvPr id="74" name="Google Shape;74;p11"/>
-          <p:cNvSpPr txBox="1"/>
+          <p:cNvSpPr txBox="1">
+            <a:spLocks noGrp="1"/>
+          </p:cNvSpPr>
           <p:nvPr>
             <p:ph type="dt" idx="10"/>
           </p:nvPr>
@@ -2501,13 +2595,17 @@
               <a:defRPr/>
             </a:lvl9pPr>
           </a:lstStyle>
-          <a:p/>
+          <a:p>
+            <a:endParaRPr/>
+          </a:p>
         </p:txBody>
       </p:sp>
       <p:sp>
         <p:nvSpPr>
           <p:cNvPr id="75" name="Google Shape;75;p11"/>
-          <p:cNvSpPr txBox="1"/>
+          <p:cNvSpPr txBox="1">
+            <a:spLocks noGrp="1"/>
+          </p:cNvSpPr>
           <p:nvPr>
             <p:ph type="ftr" idx="11"/>
           </p:nvPr>
@@ -2630,13 +2728,17 @@
               <a:defRPr/>
             </a:lvl9pPr>
           </a:lstStyle>
-          <a:p/>
+          <a:p>
+            <a:endParaRPr/>
+          </a:p>
         </p:txBody>
       </p:sp>
       <p:sp>
         <p:nvSpPr>
           <p:cNvPr id="76" name="Google Shape;76;p11"/>
-          <p:cNvSpPr txBox="1"/>
+          <p:cNvSpPr txBox="1">
+            <a:spLocks noGrp="1"/>
+          </p:cNvSpPr>
           <p:nvPr>
             <p:ph type="sldNum" idx="12"/>
           </p:nvPr>
@@ -2735,6 +2837,7 @@
             </a:pPr>
             <a:fld id="{00000000-1234-1234-1234-123412341234}" type="slidenum">
               <a:rPr lang="en-US"/>
+              <a:t>‹#›</a:t>
             </a:fld>
             <a:endParaRPr lang="en-US"/>
           </a:p>
@@ -2749,11 +2852,11 @@
 </file>
 
 <file path=ppt/slideLayouts/slideLayout11.xml><?xml version="1.0" encoding="utf-8"?>
-<p:sldLayout xmlns:a="http://schemas.openxmlformats.org/drawingml/2006/main" xmlns:r="http://schemas.openxmlformats.org/officeDocument/2006/relationships" xmlns:p="http://schemas.openxmlformats.org/presentationml/2006/main" type="vertTitleAndTx" matchingName="Vertical Title and Text">
+<p:sldLayout xmlns:a="http://schemas.openxmlformats.org/drawingml/2006/main" xmlns:r="http://schemas.openxmlformats.org/officeDocument/2006/relationships" xmlns:p="http://schemas.openxmlformats.org/presentationml/2006/main" matchingName="Vertical Title and Text" type="vertTitleAndTx">
   <p:cSld name="VERTICAL_TITLE_AND_VERTICAL_TEXT">
     <p:spTree>
       <p:nvGrpSpPr>
-        <p:cNvPr id="77" name="Shape 77"/>
+        <p:cNvPr id="1" name="Shape 77"/>
         <p:cNvGrpSpPr/>
         <p:nvPr/>
       </p:nvGrpSpPr>
@@ -2768,7 +2871,9 @@
       <p:sp>
         <p:nvSpPr>
           <p:cNvPr id="78" name="Google Shape;78;p12"/>
-          <p:cNvSpPr txBox="1"/>
+          <p:cNvSpPr txBox="1">
+            <a:spLocks noGrp="1"/>
+          </p:cNvSpPr>
           <p:nvPr>
             <p:ph type="title"/>
           </p:nvPr>
@@ -2897,13 +3002,17 @@
               <a:defRPr/>
             </a:lvl9pPr>
           </a:lstStyle>
-          <a:p/>
+          <a:p>
+            <a:endParaRPr/>
+          </a:p>
         </p:txBody>
       </p:sp>
       <p:sp>
         <p:nvSpPr>
           <p:cNvPr id="79" name="Google Shape;79;p12"/>
-          <p:cNvSpPr txBox="1"/>
+          <p:cNvSpPr txBox="1">
+            <a:spLocks noGrp="1"/>
+          </p:cNvSpPr>
           <p:nvPr>
             <p:ph type="body" idx="1"/>
           </p:nvPr>
@@ -3080,13 +3189,17 @@
               <a:defRPr/>
             </a:lvl9pPr>
           </a:lstStyle>
-          <a:p/>
+          <a:p>
+            <a:endParaRPr/>
+          </a:p>
         </p:txBody>
       </p:sp>
       <p:sp>
         <p:nvSpPr>
           <p:cNvPr id="80" name="Google Shape;80;p12"/>
-          <p:cNvSpPr txBox="1"/>
+          <p:cNvSpPr txBox="1">
+            <a:spLocks noGrp="1"/>
+          </p:cNvSpPr>
           <p:nvPr>
             <p:ph type="dt" idx="10"/>
           </p:nvPr>
@@ -3209,13 +3322,17 @@
               <a:defRPr/>
             </a:lvl9pPr>
           </a:lstStyle>
-          <a:p/>
+          <a:p>
+            <a:endParaRPr/>
+          </a:p>
         </p:txBody>
       </p:sp>
       <p:sp>
         <p:nvSpPr>
           <p:cNvPr id="81" name="Google Shape;81;p12"/>
-          <p:cNvSpPr txBox="1"/>
+          <p:cNvSpPr txBox="1">
+            <a:spLocks noGrp="1"/>
+          </p:cNvSpPr>
           <p:nvPr>
             <p:ph type="ftr" idx="11"/>
           </p:nvPr>
@@ -3338,13 +3455,17 @@
               <a:defRPr/>
             </a:lvl9pPr>
           </a:lstStyle>
-          <a:p/>
+          <a:p>
+            <a:endParaRPr/>
+          </a:p>
         </p:txBody>
       </p:sp>
       <p:sp>
         <p:nvSpPr>
           <p:cNvPr id="82" name="Google Shape;82;p12"/>
-          <p:cNvSpPr txBox="1"/>
+          <p:cNvSpPr txBox="1">
+            <a:spLocks noGrp="1"/>
+          </p:cNvSpPr>
           <p:nvPr>
             <p:ph type="sldNum" idx="12"/>
           </p:nvPr>
@@ -3443,6 +3564,7 @@
             </a:pPr>
             <a:fld id="{00000000-1234-1234-1234-123412341234}" type="slidenum">
               <a:rPr lang="en-US"/>
+              <a:t>‹#›</a:t>
             </a:fld>
             <a:endParaRPr lang="en-US"/>
           </a:p>
@@ -3457,11 +3579,11 @@
 </file>
 
 <file path=ppt/slideLayouts/slideLayout2.xml><?xml version="1.0" encoding="utf-8"?>
-<p:sldLayout xmlns:a="http://schemas.openxmlformats.org/drawingml/2006/main" xmlns:r="http://schemas.openxmlformats.org/officeDocument/2006/relationships" xmlns:p="http://schemas.openxmlformats.org/presentationml/2006/main" type="obj" matchingName="Title and Content">
+<p:sldLayout xmlns:a="http://schemas.openxmlformats.org/drawingml/2006/main" xmlns:r="http://schemas.openxmlformats.org/officeDocument/2006/relationships" xmlns:p="http://schemas.openxmlformats.org/presentationml/2006/main" matchingName="Title and Content" type="obj">
   <p:cSld name="OBJECT">
     <p:spTree>
       <p:nvGrpSpPr>
-        <p:cNvPr id="20" name="Shape 20"/>
+        <p:cNvPr id="1" name="Shape 20"/>
         <p:cNvGrpSpPr/>
         <p:nvPr/>
       </p:nvGrpSpPr>
@@ -3476,7 +3598,9 @@
       <p:sp>
         <p:nvSpPr>
           <p:cNvPr id="21" name="Google Shape;21;p3"/>
-          <p:cNvSpPr txBox="1"/>
+          <p:cNvSpPr txBox="1">
+            <a:spLocks noGrp="1"/>
+          </p:cNvSpPr>
           <p:nvPr>
             <p:ph type="title"/>
           </p:nvPr>
@@ -3605,13 +3729,17 @@
               <a:defRPr/>
             </a:lvl9pPr>
           </a:lstStyle>
-          <a:p/>
+          <a:p>
+            <a:endParaRPr/>
+          </a:p>
         </p:txBody>
       </p:sp>
       <p:sp>
         <p:nvSpPr>
           <p:cNvPr id="22" name="Google Shape;22;p3"/>
-          <p:cNvSpPr txBox="1"/>
+          <p:cNvSpPr txBox="1">
+            <a:spLocks noGrp="1"/>
+          </p:cNvSpPr>
           <p:nvPr>
             <p:ph type="body" idx="1"/>
           </p:nvPr>
@@ -3824,13 +3952,17 @@
               </a:defRPr>
             </a:lvl9pPr>
           </a:lstStyle>
-          <a:p/>
+          <a:p>
+            <a:endParaRPr/>
+          </a:p>
         </p:txBody>
       </p:sp>
       <p:sp>
         <p:nvSpPr>
           <p:cNvPr id="23" name="Google Shape;23;p3"/>
-          <p:cNvSpPr txBox="1"/>
+          <p:cNvSpPr txBox="1">
+            <a:spLocks noGrp="1"/>
+          </p:cNvSpPr>
           <p:nvPr>
             <p:ph type="dt" idx="10"/>
           </p:nvPr>
@@ -3953,13 +4085,17 @@
               <a:defRPr/>
             </a:lvl9pPr>
           </a:lstStyle>
-          <a:p/>
+          <a:p>
+            <a:endParaRPr/>
+          </a:p>
         </p:txBody>
       </p:sp>
       <p:sp>
         <p:nvSpPr>
           <p:cNvPr id="24" name="Google Shape;24;p3"/>
-          <p:cNvSpPr txBox="1"/>
+          <p:cNvSpPr txBox="1">
+            <a:spLocks noGrp="1"/>
+          </p:cNvSpPr>
           <p:nvPr>
             <p:ph type="ftr" idx="11"/>
           </p:nvPr>
@@ -4082,13 +4218,17 @@
               <a:defRPr/>
             </a:lvl9pPr>
           </a:lstStyle>
-          <a:p/>
+          <a:p>
+            <a:endParaRPr/>
+          </a:p>
         </p:txBody>
       </p:sp>
       <p:sp>
         <p:nvSpPr>
           <p:cNvPr id="25" name="Google Shape;25;p3"/>
-          <p:cNvSpPr txBox="1"/>
+          <p:cNvSpPr txBox="1">
+            <a:spLocks noGrp="1"/>
+          </p:cNvSpPr>
           <p:nvPr>
             <p:ph type="sldNum" idx="12"/>
           </p:nvPr>
@@ -4187,6 +4327,7 @@
             </a:pPr>
             <a:fld id="{00000000-1234-1234-1234-123412341234}" type="slidenum">
               <a:rPr lang="en-US"/>
+              <a:t>‹#›</a:t>
             </a:fld>
             <a:endParaRPr lang="en-US"/>
           </a:p>
@@ -4201,11 +4342,11 @@
 </file>
 
 <file path=ppt/slideLayouts/slideLayout3.xml><?xml version="1.0" encoding="utf-8"?>
-<p:sldLayout xmlns:a="http://schemas.openxmlformats.org/drawingml/2006/main" xmlns:r="http://schemas.openxmlformats.org/officeDocument/2006/relationships" xmlns:p="http://schemas.openxmlformats.org/presentationml/2006/main" type="secHead" matchingName="Section Header">
+<p:sldLayout xmlns:a="http://schemas.openxmlformats.org/drawingml/2006/main" xmlns:r="http://schemas.openxmlformats.org/officeDocument/2006/relationships" xmlns:p="http://schemas.openxmlformats.org/presentationml/2006/main" matchingName="Section Header" type="secHead">
   <p:cSld name="SECTION_HEADER">
     <p:spTree>
       <p:nvGrpSpPr>
-        <p:cNvPr id="26" name="Shape 26"/>
+        <p:cNvPr id="1" name="Shape 26"/>
         <p:cNvGrpSpPr/>
         <p:nvPr/>
       </p:nvGrpSpPr>
@@ -4220,7 +4361,9 @@
       <p:sp>
         <p:nvSpPr>
           <p:cNvPr id="27" name="Google Shape;27;p4"/>
-          <p:cNvSpPr txBox="1"/>
+          <p:cNvSpPr txBox="1">
+            <a:spLocks noGrp="1"/>
+          </p:cNvSpPr>
           <p:nvPr>
             <p:ph type="title"/>
           </p:nvPr>
@@ -4350,13 +4493,17 @@
               <a:defRPr/>
             </a:lvl9pPr>
           </a:lstStyle>
-          <a:p/>
+          <a:p>
+            <a:endParaRPr/>
+          </a:p>
         </p:txBody>
       </p:sp>
       <p:sp>
         <p:nvSpPr>
           <p:cNvPr id="28" name="Google Shape;28;p4"/>
-          <p:cNvSpPr txBox="1"/>
+          <p:cNvSpPr txBox="1">
+            <a:spLocks noGrp="1"/>
+          </p:cNvSpPr>
           <p:nvPr>
             <p:ph type="body" idx="1"/>
           </p:nvPr>
@@ -4569,13 +4716,17 @@
               </a:defRPr>
             </a:lvl9pPr>
           </a:lstStyle>
-          <a:p/>
+          <a:p>
+            <a:endParaRPr/>
+          </a:p>
         </p:txBody>
       </p:sp>
       <p:sp>
         <p:nvSpPr>
           <p:cNvPr id="29" name="Google Shape;29;p4"/>
-          <p:cNvSpPr txBox="1"/>
+          <p:cNvSpPr txBox="1">
+            <a:spLocks noGrp="1"/>
+          </p:cNvSpPr>
           <p:nvPr>
             <p:ph type="dt" idx="10"/>
           </p:nvPr>
@@ -4698,13 +4849,17 @@
               <a:defRPr/>
             </a:lvl9pPr>
           </a:lstStyle>
-          <a:p/>
+          <a:p>
+            <a:endParaRPr/>
+          </a:p>
         </p:txBody>
       </p:sp>
       <p:sp>
         <p:nvSpPr>
           <p:cNvPr id="30" name="Google Shape;30;p4"/>
-          <p:cNvSpPr txBox="1"/>
+          <p:cNvSpPr txBox="1">
+            <a:spLocks noGrp="1"/>
+          </p:cNvSpPr>
           <p:nvPr>
             <p:ph type="ftr" idx="11"/>
           </p:nvPr>
@@ -4827,13 +4982,17 @@
               <a:defRPr/>
             </a:lvl9pPr>
           </a:lstStyle>
-          <a:p/>
+          <a:p>
+            <a:endParaRPr/>
+          </a:p>
         </p:txBody>
       </p:sp>
       <p:sp>
         <p:nvSpPr>
           <p:cNvPr id="31" name="Google Shape;31;p4"/>
-          <p:cNvSpPr txBox="1"/>
+          <p:cNvSpPr txBox="1">
+            <a:spLocks noGrp="1"/>
+          </p:cNvSpPr>
           <p:nvPr>
             <p:ph type="sldNum" idx="12"/>
           </p:nvPr>
@@ -4932,6 +5091,7 @@
             </a:pPr>
             <a:fld id="{00000000-1234-1234-1234-123412341234}" type="slidenum">
               <a:rPr lang="en-US"/>
+              <a:t>‹#›</a:t>
             </a:fld>
             <a:endParaRPr lang="en-US"/>
           </a:p>
@@ -4946,11 +5106,11 @@
 </file>
 
 <file path=ppt/slideLayouts/slideLayout4.xml><?xml version="1.0" encoding="utf-8"?>
-<p:sldLayout xmlns:a="http://schemas.openxmlformats.org/drawingml/2006/main" xmlns:r="http://schemas.openxmlformats.org/officeDocument/2006/relationships" xmlns:p="http://schemas.openxmlformats.org/presentationml/2006/main" type="twoObj" matchingName="Two Content">
+<p:sldLayout xmlns:a="http://schemas.openxmlformats.org/drawingml/2006/main" xmlns:r="http://schemas.openxmlformats.org/officeDocument/2006/relationships" xmlns:p="http://schemas.openxmlformats.org/presentationml/2006/main" matchingName="Two Content" type="twoObj">
   <p:cSld name="TWO_OBJECTS">
     <p:spTree>
       <p:nvGrpSpPr>
-        <p:cNvPr id="32" name="Shape 32"/>
+        <p:cNvPr id="1" name="Shape 32"/>
         <p:cNvGrpSpPr/>
         <p:nvPr/>
       </p:nvGrpSpPr>
@@ -4965,7 +5125,9 @@
       <p:sp>
         <p:nvSpPr>
           <p:cNvPr id="33" name="Google Shape;33;p5"/>
-          <p:cNvSpPr txBox="1"/>
+          <p:cNvSpPr txBox="1">
+            <a:spLocks noGrp="1"/>
+          </p:cNvSpPr>
           <p:nvPr>
             <p:ph type="title"/>
           </p:nvPr>
@@ -5094,13 +5256,17 @@
               <a:defRPr/>
             </a:lvl9pPr>
           </a:lstStyle>
-          <a:p/>
+          <a:p>
+            <a:endParaRPr/>
+          </a:p>
         </p:txBody>
       </p:sp>
       <p:sp>
         <p:nvSpPr>
           <p:cNvPr id="34" name="Google Shape;34;p5"/>
-          <p:cNvSpPr txBox="1"/>
+          <p:cNvSpPr txBox="1">
+            <a:spLocks noGrp="1"/>
+          </p:cNvSpPr>
           <p:nvPr>
             <p:ph type="body" idx="1"/>
           </p:nvPr>
@@ -5277,13 +5443,17 @@
               <a:defRPr/>
             </a:lvl9pPr>
           </a:lstStyle>
-          <a:p/>
+          <a:p>
+            <a:endParaRPr/>
+          </a:p>
         </p:txBody>
       </p:sp>
       <p:sp>
         <p:nvSpPr>
           <p:cNvPr id="35" name="Google Shape;35;p5"/>
-          <p:cNvSpPr txBox="1"/>
+          <p:cNvSpPr txBox="1">
+            <a:spLocks noGrp="1"/>
+          </p:cNvSpPr>
           <p:nvPr>
             <p:ph type="body" idx="2"/>
           </p:nvPr>
@@ -5460,13 +5630,17 @@
               <a:defRPr/>
             </a:lvl9pPr>
           </a:lstStyle>
-          <a:p/>
+          <a:p>
+            <a:endParaRPr/>
+          </a:p>
         </p:txBody>
       </p:sp>
       <p:sp>
         <p:nvSpPr>
           <p:cNvPr id="36" name="Google Shape;36;p5"/>
-          <p:cNvSpPr txBox="1"/>
+          <p:cNvSpPr txBox="1">
+            <a:spLocks noGrp="1"/>
+          </p:cNvSpPr>
           <p:nvPr>
             <p:ph type="dt" idx="10"/>
           </p:nvPr>
@@ -5589,13 +5763,17 @@
               <a:defRPr/>
             </a:lvl9pPr>
           </a:lstStyle>
-          <a:p/>
+          <a:p>
+            <a:endParaRPr/>
+          </a:p>
         </p:txBody>
       </p:sp>
       <p:sp>
         <p:nvSpPr>
           <p:cNvPr id="37" name="Google Shape;37;p5"/>
-          <p:cNvSpPr txBox="1"/>
+          <p:cNvSpPr txBox="1">
+            <a:spLocks noGrp="1"/>
+          </p:cNvSpPr>
           <p:nvPr>
             <p:ph type="ftr" idx="11"/>
           </p:nvPr>
@@ -5718,13 +5896,17 @@
               <a:defRPr/>
             </a:lvl9pPr>
           </a:lstStyle>
-          <a:p/>
+          <a:p>
+            <a:endParaRPr/>
+          </a:p>
         </p:txBody>
       </p:sp>
       <p:sp>
         <p:nvSpPr>
           <p:cNvPr id="38" name="Google Shape;38;p5"/>
-          <p:cNvSpPr txBox="1"/>
+          <p:cNvSpPr txBox="1">
+            <a:spLocks noGrp="1"/>
+          </p:cNvSpPr>
           <p:nvPr>
             <p:ph type="sldNum" idx="12"/>
           </p:nvPr>
@@ -5823,6 +6005,7 @@
             </a:pPr>
             <a:fld id="{00000000-1234-1234-1234-123412341234}" type="slidenum">
               <a:rPr lang="en-US"/>
+              <a:t>‹#›</a:t>
             </a:fld>
             <a:endParaRPr lang="en-US"/>
           </a:p>
@@ -5837,11 +6020,11 @@
 </file>
 
 <file path=ppt/slideLayouts/slideLayout5.xml><?xml version="1.0" encoding="utf-8"?>
-<p:sldLayout xmlns:a="http://schemas.openxmlformats.org/drawingml/2006/main" xmlns:r="http://schemas.openxmlformats.org/officeDocument/2006/relationships" xmlns:p="http://schemas.openxmlformats.org/presentationml/2006/main" type="twoTxTwoObj" matchingName="Comparison">
+<p:sldLayout xmlns:a="http://schemas.openxmlformats.org/drawingml/2006/main" xmlns:r="http://schemas.openxmlformats.org/officeDocument/2006/relationships" xmlns:p="http://schemas.openxmlformats.org/presentationml/2006/main" matchingName="Comparison" type="twoTxTwoObj">
   <p:cSld name="TWO_OBJECTS_WITH_TEXT">
     <p:spTree>
       <p:nvGrpSpPr>
-        <p:cNvPr id="39" name="Shape 39"/>
+        <p:cNvPr id="1" name="Shape 39"/>
         <p:cNvGrpSpPr/>
         <p:nvPr/>
       </p:nvGrpSpPr>
@@ -5856,7 +6039,9 @@
       <p:sp>
         <p:nvSpPr>
           <p:cNvPr id="40" name="Google Shape;40;p6"/>
-          <p:cNvSpPr txBox="1"/>
+          <p:cNvSpPr txBox="1">
+            <a:spLocks noGrp="1"/>
+          </p:cNvSpPr>
           <p:nvPr>
             <p:ph type="title"/>
           </p:nvPr>
@@ -5985,13 +6170,17 @@
               <a:defRPr/>
             </a:lvl9pPr>
           </a:lstStyle>
-          <a:p/>
+          <a:p>
+            <a:endParaRPr/>
+          </a:p>
         </p:txBody>
       </p:sp>
       <p:sp>
         <p:nvSpPr>
           <p:cNvPr id="41" name="Google Shape;41;p6"/>
-          <p:cNvSpPr txBox="1"/>
+          <p:cNvSpPr txBox="1">
+            <a:spLocks noGrp="1"/>
+          </p:cNvSpPr>
           <p:nvPr>
             <p:ph type="body" idx="1"/>
           </p:nvPr>
@@ -6168,13 +6357,17 @@
               <a:defRPr sz="1600" b="1"/>
             </a:lvl9pPr>
           </a:lstStyle>
-          <a:p/>
+          <a:p>
+            <a:endParaRPr/>
+          </a:p>
         </p:txBody>
       </p:sp>
       <p:sp>
         <p:nvSpPr>
           <p:cNvPr id="42" name="Google Shape;42;p6"/>
-          <p:cNvSpPr txBox="1"/>
+          <p:cNvSpPr txBox="1">
+            <a:spLocks noGrp="1"/>
+          </p:cNvSpPr>
           <p:nvPr>
             <p:ph type="body" idx="2"/>
           </p:nvPr>
@@ -6351,13 +6544,17 @@
               <a:defRPr/>
             </a:lvl9pPr>
           </a:lstStyle>
-          <a:p/>
+          <a:p>
+            <a:endParaRPr/>
+          </a:p>
         </p:txBody>
       </p:sp>
       <p:sp>
         <p:nvSpPr>
           <p:cNvPr id="43" name="Google Shape;43;p6"/>
-          <p:cNvSpPr txBox="1"/>
+          <p:cNvSpPr txBox="1">
+            <a:spLocks noGrp="1"/>
+          </p:cNvSpPr>
           <p:nvPr>
             <p:ph type="body" idx="3"/>
           </p:nvPr>
@@ -6534,13 +6731,17 @@
               <a:defRPr sz="1600" b="1"/>
             </a:lvl9pPr>
           </a:lstStyle>
-          <a:p/>
+          <a:p>
+            <a:endParaRPr/>
+          </a:p>
         </p:txBody>
       </p:sp>
       <p:sp>
         <p:nvSpPr>
           <p:cNvPr id="44" name="Google Shape;44;p6"/>
-          <p:cNvSpPr txBox="1"/>
+          <p:cNvSpPr txBox="1">
+            <a:spLocks noGrp="1"/>
+          </p:cNvSpPr>
           <p:nvPr>
             <p:ph type="body" idx="4"/>
           </p:nvPr>
@@ -6717,13 +6918,17 @@
               <a:defRPr/>
             </a:lvl9pPr>
           </a:lstStyle>
-          <a:p/>
+          <a:p>
+            <a:endParaRPr/>
+          </a:p>
         </p:txBody>
       </p:sp>
       <p:sp>
         <p:nvSpPr>
           <p:cNvPr id="45" name="Google Shape;45;p6"/>
-          <p:cNvSpPr txBox="1"/>
+          <p:cNvSpPr txBox="1">
+            <a:spLocks noGrp="1"/>
+          </p:cNvSpPr>
           <p:nvPr>
             <p:ph type="dt" idx="10"/>
           </p:nvPr>
@@ -6846,13 +7051,17 @@
               <a:defRPr/>
             </a:lvl9pPr>
           </a:lstStyle>
-          <a:p/>
+          <a:p>
+            <a:endParaRPr/>
+          </a:p>
         </p:txBody>
       </p:sp>
       <p:sp>
         <p:nvSpPr>
           <p:cNvPr id="46" name="Google Shape;46;p6"/>
-          <p:cNvSpPr txBox="1"/>
+          <p:cNvSpPr txBox="1">
+            <a:spLocks noGrp="1"/>
+          </p:cNvSpPr>
           <p:nvPr>
             <p:ph type="ftr" idx="11"/>
           </p:nvPr>
@@ -6975,13 +7184,17 @@
               <a:defRPr/>
             </a:lvl9pPr>
           </a:lstStyle>
-          <a:p/>
+          <a:p>
+            <a:endParaRPr/>
+          </a:p>
         </p:txBody>
       </p:sp>
       <p:sp>
         <p:nvSpPr>
           <p:cNvPr id="47" name="Google Shape;47;p6"/>
-          <p:cNvSpPr txBox="1"/>
+          <p:cNvSpPr txBox="1">
+            <a:spLocks noGrp="1"/>
+          </p:cNvSpPr>
           <p:nvPr>
             <p:ph type="sldNum" idx="12"/>
           </p:nvPr>
@@ -7080,6 +7293,7 @@
             </a:pPr>
             <a:fld id="{00000000-1234-1234-1234-123412341234}" type="slidenum">
               <a:rPr lang="en-US"/>
+              <a:t>‹#›</a:t>
             </a:fld>
             <a:endParaRPr lang="en-US"/>
           </a:p>
@@ -7094,11 +7308,11 @@
 </file>
 
 <file path=ppt/slideLayouts/slideLayout6.xml><?xml version="1.0" encoding="utf-8"?>
-<p:sldLayout xmlns:a="http://schemas.openxmlformats.org/drawingml/2006/main" xmlns:r="http://schemas.openxmlformats.org/officeDocument/2006/relationships" xmlns:p="http://schemas.openxmlformats.org/presentationml/2006/main" type="titleOnly" matchingName="Title Only">
+<p:sldLayout xmlns:a="http://schemas.openxmlformats.org/drawingml/2006/main" xmlns:r="http://schemas.openxmlformats.org/officeDocument/2006/relationships" xmlns:p="http://schemas.openxmlformats.org/presentationml/2006/main" matchingName="Title Only" type="titleOnly">
   <p:cSld name="TITLE_ONLY">
     <p:spTree>
       <p:nvGrpSpPr>
-        <p:cNvPr id="48" name="Shape 48"/>
+        <p:cNvPr id="1" name="Shape 48"/>
         <p:cNvGrpSpPr/>
         <p:nvPr/>
       </p:nvGrpSpPr>
@@ -7113,7 +7327,9 @@
       <p:sp>
         <p:nvSpPr>
           <p:cNvPr id="49" name="Google Shape;49;p7"/>
-          <p:cNvSpPr txBox="1"/>
+          <p:cNvSpPr txBox="1">
+            <a:spLocks noGrp="1"/>
+          </p:cNvSpPr>
           <p:nvPr>
             <p:ph type="title"/>
           </p:nvPr>
@@ -7242,13 +7458,17 @@
               <a:defRPr/>
             </a:lvl9pPr>
           </a:lstStyle>
-          <a:p/>
+          <a:p>
+            <a:endParaRPr/>
+          </a:p>
         </p:txBody>
       </p:sp>
       <p:sp>
         <p:nvSpPr>
           <p:cNvPr id="50" name="Google Shape;50;p7"/>
-          <p:cNvSpPr txBox="1"/>
+          <p:cNvSpPr txBox="1">
+            <a:spLocks noGrp="1"/>
+          </p:cNvSpPr>
           <p:nvPr>
             <p:ph type="dt" idx="10"/>
           </p:nvPr>
@@ -7371,13 +7591,17 @@
               <a:defRPr/>
             </a:lvl9pPr>
           </a:lstStyle>
-          <a:p/>
+          <a:p>
+            <a:endParaRPr/>
+          </a:p>
         </p:txBody>
       </p:sp>
       <p:sp>
         <p:nvSpPr>
           <p:cNvPr id="51" name="Google Shape;51;p7"/>
-          <p:cNvSpPr txBox="1"/>
+          <p:cNvSpPr txBox="1">
+            <a:spLocks noGrp="1"/>
+          </p:cNvSpPr>
           <p:nvPr>
             <p:ph type="ftr" idx="11"/>
           </p:nvPr>
@@ -7500,13 +7724,17 @@
               <a:defRPr/>
             </a:lvl9pPr>
           </a:lstStyle>
-          <a:p/>
+          <a:p>
+            <a:endParaRPr/>
+          </a:p>
         </p:txBody>
       </p:sp>
       <p:sp>
         <p:nvSpPr>
           <p:cNvPr id="52" name="Google Shape;52;p7"/>
-          <p:cNvSpPr txBox="1"/>
+          <p:cNvSpPr txBox="1">
+            <a:spLocks noGrp="1"/>
+          </p:cNvSpPr>
           <p:nvPr>
             <p:ph type="sldNum" idx="12"/>
           </p:nvPr>
@@ -7605,6 +7833,7 @@
             </a:pPr>
             <a:fld id="{00000000-1234-1234-1234-123412341234}" type="slidenum">
               <a:rPr lang="en-US"/>
+              <a:t>‹#›</a:t>
             </a:fld>
             <a:endParaRPr lang="en-US"/>
           </a:p>
@@ -7619,11 +7848,11 @@
 </file>
 
 <file path=ppt/slideLayouts/slideLayout7.xml><?xml version="1.0" encoding="utf-8"?>
-<p:sldLayout xmlns:a="http://schemas.openxmlformats.org/drawingml/2006/main" xmlns:r="http://schemas.openxmlformats.org/officeDocument/2006/relationships" xmlns:p="http://schemas.openxmlformats.org/presentationml/2006/main" type="blank" matchingName="Blank">
+<p:sldLayout xmlns:a="http://schemas.openxmlformats.org/drawingml/2006/main" xmlns:r="http://schemas.openxmlformats.org/officeDocument/2006/relationships" xmlns:p="http://schemas.openxmlformats.org/presentationml/2006/main" matchingName="Blank" type="blank">
   <p:cSld name="BLANK">
     <p:spTree>
       <p:nvGrpSpPr>
-        <p:cNvPr id="53" name="Shape 53"/>
+        <p:cNvPr id="1" name="Shape 53"/>
         <p:cNvGrpSpPr/>
         <p:nvPr/>
       </p:nvGrpSpPr>
@@ -7638,7 +7867,9 @@
       <p:sp>
         <p:nvSpPr>
           <p:cNvPr id="54" name="Google Shape;54;p8"/>
-          <p:cNvSpPr txBox="1"/>
+          <p:cNvSpPr txBox="1">
+            <a:spLocks noGrp="1"/>
+          </p:cNvSpPr>
           <p:nvPr>
             <p:ph type="dt" idx="10"/>
           </p:nvPr>
@@ -7761,13 +7992,17 @@
               <a:defRPr/>
             </a:lvl9pPr>
           </a:lstStyle>
-          <a:p/>
+          <a:p>
+            <a:endParaRPr/>
+          </a:p>
         </p:txBody>
       </p:sp>
       <p:sp>
         <p:nvSpPr>
           <p:cNvPr id="55" name="Google Shape;55;p8"/>
-          <p:cNvSpPr txBox="1"/>
+          <p:cNvSpPr txBox="1">
+            <a:spLocks noGrp="1"/>
+          </p:cNvSpPr>
           <p:nvPr>
             <p:ph type="ftr" idx="11"/>
           </p:nvPr>
@@ -7890,13 +8125,17 @@
               <a:defRPr/>
             </a:lvl9pPr>
           </a:lstStyle>
-          <a:p/>
+          <a:p>
+            <a:endParaRPr/>
+          </a:p>
         </p:txBody>
       </p:sp>
       <p:sp>
         <p:nvSpPr>
           <p:cNvPr id="56" name="Google Shape;56;p8"/>
-          <p:cNvSpPr txBox="1"/>
+          <p:cNvSpPr txBox="1">
+            <a:spLocks noGrp="1"/>
+          </p:cNvSpPr>
           <p:nvPr>
             <p:ph type="sldNum" idx="12"/>
           </p:nvPr>
@@ -7995,6 +8234,7 @@
             </a:pPr>
             <a:fld id="{00000000-1234-1234-1234-123412341234}" type="slidenum">
               <a:rPr lang="en-US"/>
+              <a:t>‹#›</a:t>
             </a:fld>
             <a:endParaRPr lang="en-US"/>
           </a:p>
@@ -8009,11 +8249,11 @@
 </file>
 
 <file path=ppt/slideLayouts/slideLayout8.xml><?xml version="1.0" encoding="utf-8"?>
-<p:sldLayout xmlns:a="http://schemas.openxmlformats.org/drawingml/2006/main" xmlns:r="http://schemas.openxmlformats.org/officeDocument/2006/relationships" xmlns:p="http://schemas.openxmlformats.org/presentationml/2006/main" type="objTx" matchingName="Content with Caption">
+<p:sldLayout xmlns:a="http://schemas.openxmlformats.org/drawingml/2006/main" xmlns:r="http://schemas.openxmlformats.org/officeDocument/2006/relationships" xmlns:p="http://schemas.openxmlformats.org/presentationml/2006/main" matchingName="Content with Caption" type="objTx">
   <p:cSld name="OBJECT_WITH_CAPTION_TEXT">
     <p:spTree>
       <p:nvGrpSpPr>
-        <p:cNvPr id="57" name="Shape 57"/>
+        <p:cNvPr id="1" name="Shape 57"/>
         <p:cNvGrpSpPr/>
         <p:nvPr/>
       </p:nvGrpSpPr>
@@ -8028,7 +8268,9 @@
       <p:sp>
         <p:nvSpPr>
           <p:cNvPr id="58" name="Google Shape;58;p9"/>
-          <p:cNvSpPr txBox="1"/>
+          <p:cNvSpPr txBox="1">
+            <a:spLocks noGrp="1"/>
+          </p:cNvSpPr>
           <p:nvPr>
             <p:ph type="title"/>
           </p:nvPr>
@@ -8158,13 +8400,17 @@
               <a:defRPr/>
             </a:lvl9pPr>
           </a:lstStyle>
-          <a:p/>
+          <a:p>
+            <a:endParaRPr/>
+          </a:p>
         </p:txBody>
       </p:sp>
       <p:sp>
         <p:nvSpPr>
           <p:cNvPr id="59" name="Google Shape;59;p9"/>
-          <p:cNvSpPr txBox="1"/>
+          <p:cNvSpPr txBox="1">
+            <a:spLocks noGrp="1"/>
+          </p:cNvSpPr>
           <p:nvPr>
             <p:ph type="body" idx="1"/>
           </p:nvPr>
@@ -8341,13 +8587,17 @@
               <a:defRPr sz="2000"/>
             </a:lvl9pPr>
           </a:lstStyle>
-          <a:p/>
+          <a:p>
+            <a:endParaRPr/>
+          </a:p>
         </p:txBody>
       </p:sp>
       <p:sp>
         <p:nvSpPr>
           <p:cNvPr id="60" name="Google Shape;60;p9"/>
-          <p:cNvSpPr txBox="1"/>
+          <p:cNvSpPr txBox="1">
+            <a:spLocks noGrp="1"/>
+          </p:cNvSpPr>
           <p:nvPr>
             <p:ph type="body" idx="2"/>
           </p:nvPr>
@@ -8524,13 +8774,17 @@
               <a:defRPr sz="1000"/>
             </a:lvl9pPr>
           </a:lstStyle>
-          <a:p/>
+          <a:p>
+            <a:endParaRPr/>
+          </a:p>
         </p:txBody>
       </p:sp>
       <p:sp>
         <p:nvSpPr>
           <p:cNvPr id="61" name="Google Shape;61;p9"/>
-          <p:cNvSpPr txBox="1"/>
+          <p:cNvSpPr txBox="1">
+            <a:spLocks noGrp="1"/>
+          </p:cNvSpPr>
           <p:nvPr>
             <p:ph type="dt" idx="10"/>
           </p:nvPr>
@@ -8653,13 +8907,17 @@
               <a:defRPr/>
             </a:lvl9pPr>
           </a:lstStyle>
-          <a:p/>
+          <a:p>
+            <a:endParaRPr/>
+          </a:p>
         </p:txBody>
       </p:sp>
       <p:sp>
         <p:nvSpPr>
           <p:cNvPr id="62" name="Google Shape;62;p9"/>
-          <p:cNvSpPr txBox="1"/>
+          <p:cNvSpPr txBox="1">
+            <a:spLocks noGrp="1"/>
+          </p:cNvSpPr>
           <p:nvPr>
             <p:ph type="ftr" idx="11"/>
           </p:nvPr>
@@ -8782,13 +9040,17 @@
               <a:defRPr/>
             </a:lvl9pPr>
           </a:lstStyle>
-          <a:p/>
+          <a:p>
+            <a:endParaRPr/>
+          </a:p>
         </p:txBody>
       </p:sp>
       <p:sp>
         <p:nvSpPr>
           <p:cNvPr id="63" name="Google Shape;63;p9"/>
-          <p:cNvSpPr txBox="1"/>
+          <p:cNvSpPr txBox="1">
+            <a:spLocks noGrp="1"/>
+          </p:cNvSpPr>
           <p:nvPr>
             <p:ph type="sldNum" idx="12"/>
           </p:nvPr>
@@ -8887,6 +9149,7 @@
             </a:pPr>
             <a:fld id="{00000000-1234-1234-1234-123412341234}" type="slidenum">
               <a:rPr lang="en-US"/>
+              <a:t>‹#›</a:t>
             </a:fld>
             <a:endParaRPr lang="en-US"/>
           </a:p>
@@ -8901,11 +9164,11 @@
 </file>
 
 <file path=ppt/slideLayouts/slideLayout9.xml><?xml version="1.0" encoding="utf-8"?>
-<p:sldLayout xmlns:a="http://schemas.openxmlformats.org/drawingml/2006/main" xmlns:r="http://schemas.openxmlformats.org/officeDocument/2006/relationships" xmlns:p="http://schemas.openxmlformats.org/presentationml/2006/main" type="picTx" matchingName="Picture with Caption">
+<p:sldLayout xmlns:a="http://schemas.openxmlformats.org/drawingml/2006/main" xmlns:r="http://schemas.openxmlformats.org/officeDocument/2006/relationships" xmlns:p="http://schemas.openxmlformats.org/presentationml/2006/main" matchingName="Picture with Caption" type="picTx">
   <p:cSld name="PICTURE_WITH_CAPTION_TEXT">
     <p:spTree>
       <p:nvGrpSpPr>
-        <p:cNvPr id="64" name="Shape 64"/>
+        <p:cNvPr id="1" name="Shape 64"/>
         <p:cNvGrpSpPr/>
         <p:nvPr/>
       </p:nvGrpSpPr>
@@ -8920,7 +9183,9 @@
       <p:sp>
         <p:nvSpPr>
           <p:cNvPr id="65" name="Google Shape;65;p10"/>
-          <p:cNvSpPr txBox="1"/>
+          <p:cNvSpPr txBox="1">
+            <a:spLocks noGrp="1"/>
+          </p:cNvSpPr>
           <p:nvPr>
             <p:ph type="title"/>
           </p:nvPr>
@@ -9050,13 +9315,17 @@
               <a:defRPr/>
             </a:lvl9pPr>
           </a:lstStyle>
-          <a:p/>
+          <a:p>
+            <a:endParaRPr/>
+          </a:p>
         </p:txBody>
       </p:sp>
       <p:sp>
         <p:nvSpPr>
           <p:cNvPr id="66" name="Google Shape;66;p10"/>
-          <p:cNvSpPr/>
+          <p:cNvSpPr>
+            <a:spLocks noGrp="1"/>
+          </p:cNvSpPr>
           <p:nvPr>
             <p:ph type="pic" idx="2"/>
           </p:nvPr>
@@ -9078,7 +9347,9 @@
       <p:sp>
         <p:nvSpPr>
           <p:cNvPr id="67" name="Google Shape;67;p10"/>
-          <p:cNvSpPr txBox="1"/>
+          <p:cNvSpPr txBox="1">
+            <a:spLocks noGrp="1"/>
+          </p:cNvSpPr>
           <p:nvPr>
             <p:ph type="body" idx="1"/>
           </p:nvPr>
@@ -9255,13 +9526,17 @@
               <a:defRPr sz="1000"/>
             </a:lvl9pPr>
           </a:lstStyle>
-          <a:p/>
+          <a:p>
+            <a:endParaRPr/>
+          </a:p>
         </p:txBody>
       </p:sp>
       <p:sp>
         <p:nvSpPr>
           <p:cNvPr id="68" name="Google Shape;68;p10"/>
-          <p:cNvSpPr txBox="1"/>
+          <p:cNvSpPr txBox="1">
+            <a:spLocks noGrp="1"/>
+          </p:cNvSpPr>
           <p:nvPr>
             <p:ph type="dt" idx="10"/>
           </p:nvPr>
@@ -9384,13 +9659,17 @@
               <a:defRPr/>
             </a:lvl9pPr>
           </a:lstStyle>
-          <a:p/>
+          <a:p>
+            <a:endParaRPr/>
+          </a:p>
         </p:txBody>
       </p:sp>
       <p:sp>
         <p:nvSpPr>
           <p:cNvPr id="69" name="Google Shape;69;p10"/>
-          <p:cNvSpPr txBox="1"/>
+          <p:cNvSpPr txBox="1">
+            <a:spLocks noGrp="1"/>
+          </p:cNvSpPr>
           <p:nvPr>
             <p:ph type="ftr" idx="11"/>
           </p:nvPr>
@@ -9513,13 +9792,17 @@
               <a:defRPr/>
             </a:lvl9pPr>
           </a:lstStyle>
-          <a:p/>
+          <a:p>
+            <a:endParaRPr/>
+          </a:p>
         </p:txBody>
       </p:sp>
       <p:sp>
         <p:nvSpPr>
           <p:cNvPr id="70" name="Google Shape;70;p10"/>
-          <p:cNvSpPr txBox="1"/>
+          <p:cNvSpPr txBox="1">
+            <a:spLocks noGrp="1"/>
+          </p:cNvSpPr>
           <p:nvPr>
             <p:ph type="sldNum" idx="12"/>
           </p:nvPr>
@@ -9618,6 +9901,7 @@
             </a:pPr>
             <a:fld id="{00000000-1234-1234-1234-123412341234}" type="slidenum">
               <a:rPr lang="en-US"/>
+              <a:t>‹#›</a:t>
             </a:fld>
             <a:endParaRPr lang="en-US"/>
           </a:p>
@@ -9644,7 +9928,7 @@
     </p:bg>
     <p:spTree>
       <p:nvGrpSpPr>
-        <p:cNvPr id="5" name="Shape 5"/>
+        <p:cNvPr id="1" name="Shape 5"/>
         <p:cNvGrpSpPr/>
         <p:nvPr/>
       </p:nvGrpSpPr>
@@ -9659,7 +9943,9 @@
       <p:sp>
         <p:nvSpPr>
           <p:cNvPr id="6" name="Google Shape;6;p1"/>
-          <p:cNvSpPr txBox="1"/>
+          <p:cNvSpPr txBox="1">
+            <a:spLocks noGrp="1"/>
+          </p:cNvSpPr>
           <p:nvPr>
             <p:ph type="title"/>
           </p:nvPr>
@@ -9893,13 +10179,17 @@
               </a:defRPr>
             </a:lvl9pPr>
           </a:lstStyle>
-          <a:p/>
+          <a:p>
+            <a:endParaRPr/>
+          </a:p>
         </p:txBody>
       </p:sp>
       <p:sp>
         <p:nvSpPr>
           <p:cNvPr id="7" name="Google Shape;7;p1"/>
-          <p:cNvSpPr txBox="1"/>
+          <p:cNvSpPr txBox="1">
+            <a:spLocks noGrp="1"/>
+          </p:cNvSpPr>
           <p:nvPr>
             <p:ph type="body" idx="1"/>
           </p:nvPr>
@@ -10103,13 +10393,17 @@
               </a:defRPr>
             </a:lvl9pPr>
           </a:lstStyle>
-          <a:p/>
+          <a:p>
+            <a:endParaRPr/>
+          </a:p>
         </p:txBody>
       </p:sp>
       <p:sp>
         <p:nvSpPr>
           <p:cNvPr id="8" name="Google Shape;8;p1"/>
-          <p:cNvSpPr txBox="1"/>
+          <p:cNvSpPr txBox="1">
+            <a:spLocks noGrp="1"/>
+          </p:cNvSpPr>
           <p:nvPr>
             <p:ph type="dt" idx="10"/>
           </p:nvPr>
@@ -10304,13 +10598,17 @@
               </a:defRPr>
             </a:lvl9pPr>
           </a:lstStyle>
-          <a:p/>
+          <a:p>
+            <a:endParaRPr/>
+          </a:p>
         </p:txBody>
       </p:sp>
       <p:sp>
         <p:nvSpPr>
           <p:cNvPr id="9" name="Google Shape;9;p1"/>
-          <p:cNvSpPr txBox="1"/>
+          <p:cNvSpPr txBox="1">
+            <a:spLocks noGrp="1"/>
+          </p:cNvSpPr>
           <p:nvPr>
             <p:ph type="ftr" idx="11"/>
           </p:nvPr>
@@ -10505,13 +10803,17 @@
               </a:defRPr>
             </a:lvl9pPr>
           </a:lstStyle>
-          <a:p/>
+          <a:p>
+            <a:endParaRPr/>
+          </a:p>
         </p:txBody>
       </p:sp>
       <p:sp>
         <p:nvSpPr>
           <p:cNvPr id="10" name="Google Shape;10;p1"/>
-          <p:cNvSpPr txBox="1"/>
+          <p:cNvSpPr txBox="1">
+            <a:spLocks noGrp="1"/>
+          </p:cNvSpPr>
           <p:nvPr>
             <p:ph type="sldNum" idx="12"/>
           </p:nvPr>
@@ -10682,6 +10984,7 @@
             </a:pPr>
             <a:fld id="{00000000-1234-1234-1234-123412341234}" type="slidenum">
               <a:rPr lang="en-US"/>
+              <a:t>‹#›</a:t>
             </a:fld>
             <a:endParaRPr lang="en-US"/>
           </a:p>
@@ -10690,32 +10993,6 @@
       <p:pic>
         <p:nvPicPr>
           <p:cNvPr id="11" name="Google Shape;11;p1" title="i hackathon (3).png"/>
-          <p:cNvPicPr preferRelativeResize="0"/>
-          <p:nvPr/>
-        </p:nvPicPr>
-        <p:blipFill>
-          <a:blip r:embed="rId12"/>
-          <a:stretch>
-            <a:fillRect/>
-          </a:stretch>
-        </p:blipFill>
-        <p:spPr>
-          <a:xfrm>
-            <a:off x="838200" y="401500"/>
-            <a:ext cx="758250" cy="763975"/>
-          </a:xfrm>
-          <a:prstGeom prst="rect">
-            <a:avLst/>
-          </a:prstGeom>
-          <a:noFill/>
-          <a:ln>
-            <a:noFill/>
-          </a:ln>
-        </p:spPr>
-      </p:pic>
-      <p:pic>
-        <p:nvPicPr>
-          <p:cNvPr id="12" name="Google Shape;12;p1" title="i_hackathon-removebg-preview.png"/>
           <p:cNvPicPr preferRelativeResize="0"/>
           <p:nvPr/>
         </p:nvPicPr>
@@ -10727,6 +11004,32 @@
         </p:blipFill>
         <p:spPr>
           <a:xfrm>
+            <a:off x="838200" y="401500"/>
+            <a:ext cx="758250" cy="763975"/>
+          </a:xfrm>
+          <a:prstGeom prst="rect">
+            <a:avLst/>
+          </a:prstGeom>
+          <a:noFill/>
+          <a:ln>
+            <a:noFill/>
+          </a:ln>
+        </p:spPr>
+      </p:pic>
+      <p:pic>
+        <p:nvPicPr>
+          <p:cNvPr id="12" name="Google Shape;12;p1" title="i_hackathon-removebg-preview.png"/>
+          <p:cNvPicPr preferRelativeResize="0"/>
+          <p:nvPr/>
+        </p:nvPicPr>
+        <p:blipFill>
+          <a:blip r:embed="rId14"/>
+          <a:stretch>
+            <a:fillRect/>
+          </a:stretch>
+        </p:blipFill>
+        <p:spPr>
+          <a:xfrm>
             <a:off x="9339376" y="317500"/>
             <a:ext cx="2664498" cy="931975"/>
           </a:xfrm>
@@ -10746,7 +11049,7 @@
           <p:nvPr/>
         </p:nvPicPr>
         <p:blipFill>
-          <a:blip r:embed="rId14"/>
+          <a:blip r:embed="rId15"/>
           <a:stretch>
             <a:fillRect/>
           </a:stretch>
@@ -11479,7 +11782,7 @@
   <p:cSld>
     <p:spTree>
       <p:nvGrpSpPr>
-        <p:cNvPr id="86" name="Shape 86"/>
+        <p:cNvPr id="1" name="Shape 86"/>
         <p:cNvGrpSpPr/>
         <p:nvPr/>
       </p:nvGrpSpPr>
@@ -11498,7 +11801,7 @@
           <p:nvPr/>
         </p:nvPicPr>
         <p:blipFill>
-          <a:blip r:embed="rId1"/>
+          <a:blip r:embed="rId3"/>
           <a:stretch>
             <a:fillRect/>
           </a:stretch>
@@ -11549,12 +11852,6 @@
               </a:rPr>
               <a:t>RepoPilot</a:t>
             </a:r>
-            <a:endParaRPr sz="3100" b="1">
-              <a:solidFill>
-                <a:srgbClr val="16223C"/>
-              </a:solidFill>
-              <a:latin typeface="Arial" panose="020B0604020202020204"/>
-            </a:endParaRPr>
           </a:p>
         </p:txBody>
       </p:sp>
@@ -11598,6 +11895,7 @@
           <a:lstStyle/>
           <a:p>
             <a:pPr algn="ctr"/>
+            <a:endParaRPr/>
           </a:p>
         </p:txBody>
       </p:sp>
@@ -11633,12 +11931,6 @@
               </a:rPr>
               <a:t>BUILD THE BRAIN.  DEBUG ON AUTOPILOT.</a:t>
             </a:r>
-            <a:endParaRPr sz="2000" b="1">
-              <a:solidFill>
-                <a:srgbClr val="0A0A0C"/>
-              </a:solidFill>
-              <a:latin typeface="Arial" panose="020B0604020202020204"/>
-            </a:endParaRPr>
           </a:p>
         </p:txBody>
       </p:sp>
@@ -11674,12 +11966,6 @@
               </a:rPr>
               <a:t>Track 2 — Build the Brain, Not the Puppet</a:t>
             </a:r>
-            <a:endParaRPr sz="1500" b="1">
-              <a:solidFill>
-                <a:srgbClr val="D2232A"/>
-              </a:solidFill>
-              <a:latin typeface="Arial" panose="020B0604020202020204"/>
-            </a:endParaRPr>
           </a:p>
         </p:txBody>
       </p:sp>
@@ -11692,7 +11978,7 @@
         <p:spPr>
           <a:xfrm>
             <a:off x="2286000" y="4828032"/>
-            <a:ext cx="7498079" cy="475488"/>
+            <a:ext cx="7498079" cy="153888"/>
           </a:xfrm>
           <a:prstGeom prst="rect">
             <a:avLst/>
@@ -11707,20 +11993,65 @@
           <a:p>
             <a:pPr algn="ctr"/>
             <a:r>
-              <a:rPr sz="1000" b="0">
+              <a:rPr sz="1000" b="0" dirty="0">
                 <a:solidFill>
                   <a:srgbClr val="5B6370"/>
                 </a:solidFill>
                 <a:latin typeface="Arial" panose="020B0604020202020204"/>
               </a:rPr>
-              <a:t>Team: Person 1 — Agent Brain  |  Person 2 — Tools &amp; Security  |  Person 3 — Frontend, API &amp; Demo</a:t>
+              <a:t>Team: </a:t>
             </a:r>
-            <a:endParaRPr sz="1000" b="0">
-              <a:solidFill>
-                <a:srgbClr val="5B6370"/>
-              </a:solidFill>
-              <a:latin typeface="Arial" panose="020B0604020202020204"/>
-            </a:endParaRPr>
+            <a:r>
+              <a:rPr lang="en-US" sz="1000" dirty="0">
+                <a:solidFill>
+                  <a:srgbClr val="5B6370"/>
+                </a:solidFill>
+              </a:rPr>
+              <a:t>Aman Tyagi</a:t>
+            </a:r>
+            <a:r>
+              <a:rPr sz="1000" b="0" dirty="0">
+                <a:solidFill>
+                  <a:srgbClr val="5B6370"/>
+                </a:solidFill>
+                <a:latin typeface="Arial" panose="020B0604020202020204"/>
+              </a:rPr>
+              <a:t> — Agent Brain  |  </a:t>
+            </a:r>
+            <a:r>
+              <a:rPr lang="en-US" sz="1000" dirty="0">
+                <a:solidFill>
+                  <a:srgbClr val="5B6370"/>
+                </a:solidFill>
+              </a:rPr>
+              <a:t>Sahaj Kumar</a:t>
+            </a:r>
+            <a:r>
+              <a:rPr sz="1000" b="0" dirty="0">
+                <a:solidFill>
+                  <a:srgbClr val="5B6370"/>
+                </a:solidFill>
+                <a:latin typeface="Arial" panose="020B0604020202020204"/>
+              </a:rPr>
+              <a:t> — Tools &amp; Security  |  </a:t>
+            </a:r>
+            <a:r>
+              <a:rPr lang="en-US" sz="1000" dirty="0">
+                <a:solidFill>
+                  <a:srgbClr val="5B6370"/>
+                </a:solidFill>
+              </a:rPr>
+              <a:t>Siddhant Asati</a:t>
+            </a:r>
+            <a:r>
+              <a:rPr sz="1000" b="0" dirty="0">
+                <a:solidFill>
+                  <a:srgbClr val="5B6370"/>
+                </a:solidFill>
+                <a:latin typeface="Arial" panose="020B0604020202020204"/>
+              </a:rPr>
+              <a:t> — Frontend, API &amp; Demo</a:t>
+            </a:r>
           </a:p>
         </p:txBody>
       </p:sp>
@@ -11737,7 +12068,7 @@
   <p:cSld>
     <p:spTree>
       <p:nvGrpSpPr>
-        <p:cNvPr id="93" name="Shape 93"/>
+        <p:cNvPr id="1" name="Shape 93"/>
         <p:cNvGrpSpPr/>
         <p:nvPr/>
       </p:nvGrpSpPr>
@@ -11781,12 +12112,6 @@
               </a:rPr>
               <a:t>Problem Understanding</a:t>
             </a:r>
-            <a:endParaRPr sz="3100" b="1">
-              <a:solidFill>
-                <a:srgbClr val="0A0A0C"/>
-              </a:solidFill>
-              <a:latin typeface="Arial" panose="020B0604020202020204"/>
-            </a:endParaRPr>
           </a:p>
         </p:txBody>
       </p:sp>
@@ -11830,6 +12155,7 @@
           <a:lstStyle/>
           <a:p>
             <a:pPr algn="ctr"/>
+            <a:endParaRPr/>
           </a:p>
         </p:txBody>
       </p:sp>
@@ -11865,12 +12191,6 @@
               </a:rPr>
               <a:t>DEBUGGING IS NOT A CHECKLIST.</a:t>
             </a:r>
-            <a:endParaRPr sz="2000" b="1">
-              <a:solidFill>
-                <a:srgbClr val="16223C"/>
-              </a:solidFill>
-              <a:latin typeface="Arial" panose="020B0604020202020204"/>
-            </a:endParaRPr>
           </a:p>
         </p:txBody>
       </p:sp>
@@ -11906,12 +12226,6 @@
               </a:rPr>
               <a:t>Real debugging is iterative: developers inspect code, form hypotheses, run checks, interpret evidence, and change direction when reality disagrees.</a:t>
             </a:r>
-            <a:endParaRPr sz="1700" b="0">
-              <a:solidFill>
-                <a:srgbClr val="0A0A0C"/>
-              </a:solidFill>
-              <a:latin typeface="Arial" panose="020B0604020202020204"/>
-            </a:endParaRPr>
           </a:p>
         </p:txBody>
       </p:sp>
@@ -11998,12 +12312,6 @@
               </a:rPr>
               <a:t>THE GAP</a:t>
             </a:r>
-            <a:endParaRPr sz="1200" b="1">
-              <a:solidFill>
-                <a:srgbClr val="D2232A"/>
-              </a:solidFill>
-              <a:latin typeface="Arial" panose="020B0604020202020204"/>
-            </a:endParaRPr>
           </a:p>
         </p:txBody>
       </p:sp>
@@ -12039,12 +12347,6 @@
               </a:rPr>
               <a:t>A fixed workflow can execute actions — but it cannot reliably decide what the next action should be after an unexpected result.</a:t>
             </a:r>
-            <a:endParaRPr sz="1600" b="0">
-              <a:solidFill>
-                <a:srgbClr val="0A0A0C"/>
-              </a:solidFill>
-              <a:latin typeface="Arial" panose="020B0604020202020204"/>
-            </a:endParaRPr>
           </a:p>
         </p:txBody>
       </p:sp>
@@ -12080,12 +12382,6 @@
               </a:rPr>
               <a:t>FIXED AUTOMATION</a:t>
             </a:r>
-            <a:endParaRPr sz="1100" b="1">
-              <a:solidFill>
-                <a:srgbClr val="5B6370"/>
-              </a:solidFill>
-              <a:latin typeface="Arial" panose="020B0604020202020204"/>
-            </a:endParaRPr>
           </a:p>
         </p:txBody>
       </p:sp>
@@ -12140,12 +12436,6 @@
               </a:rPr>
               <a:t>Task</a:t>
             </a:r>
-            <a:endParaRPr sz="1300" b="1">
-              <a:solidFill>
-                <a:srgbClr val="0A0A0C"/>
-              </a:solidFill>
-              <a:latin typeface="Arial" panose="020B0604020202020204"/>
-            </a:endParaRPr>
           </a:p>
         </p:txBody>
       </p:sp>
@@ -12235,12 +12525,6 @@
               </a:rPr>
               <a:t>Tool A</a:t>
             </a:r>
-            <a:endParaRPr sz="1300" b="1">
-              <a:solidFill>
-                <a:srgbClr val="0A0A0C"/>
-              </a:solidFill>
-              <a:latin typeface="Arial" panose="020B0604020202020204"/>
-            </a:endParaRPr>
           </a:p>
         </p:txBody>
       </p:sp>
@@ -12330,12 +12614,6 @@
               </a:rPr>
               <a:t>Tool B</a:t>
             </a:r>
-            <a:endParaRPr sz="1300" b="1">
-              <a:solidFill>
-                <a:srgbClr val="0A0A0C"/>
-              </a:solidFill>
-              <a:latin typeface="Arial" panose="020B0604020202020204"/>
-            </a:endParaRPr>
           </a:p>
         </p:txBody>
       </p:sp>
@@ -12425,12 +12703,6 @@
               </a:rPr>
               <a:t>Done</a:t>
             </a:r>
-            <a:endParaRPr sz="1300" b="1">
-              <a:solidFill>
-                <a:srgbClr val="0A0A0C"/>
-              </a:solidFill>
-              <a:latin typeface="Arial" panose="020B0604020202020204"/>
-            </a:endParaRPr>
           </a:p>
         </p:txBody>
       </p:sp>
@@ -12466,12 +12738,6 @@
               </a:rPr>
               <a:t>AUTONOMOUS LOOP</a:t>
             </a:r>
-            <a:endParaRPr sz="1100" b="1">
-              <a:solidFill>
-                <a:srgbClr val="D2232A"/>
-              </a:solidFill>
-              <a:latin typeface="Arial" panose="020B0604020202020204"/>
-            </a:endParaRPr>
           </a:p>
         </p:txBody>
       </p:sp>
@@ -12526,12 +12792,6 @@
               </a:rPr>
               <a:t>Task</a:t>
             </a:r>
-            <a:endParaRPr sz="1200" b="1">
-              <a:solidFill>
-                <a:srgbClr val="16223C"/>
-              </a:solidFill>
-              <a:latin typeface="Arial" panose="020B0604020202020204"/>
-            </a:endParaRPr>
           </a:p>
         </p:txBody>
       </p:sp>
@@ -12586,12 +12846,6 @@
               </a:rPr>
               <a:t>Plan</a:t>
             </a:r>
-            <a:endParaRPr sz="1200" b="1">
-              <a:solidFill>
-                <a:srgbClr val="16223C"/>
-              </a:solidFill>
-              <a:latin typeface="Arial" panose="020B0604020202020204"/>
-            </a:endParaRPr>
           </a:p>
         </p:txBody>
       </p:sp>
@@ -12646,12 +12900,6 @@
               </a:rPr>
               <a:t>Choose</a:t>
             </a:r>
-            <a:endParaRPr sz="1200" b="1">
-              <a:solidFill>
-                <a:srgbClr val="16223C"/>
-              </a:solidFill>
-              <a:latin typeface="Arial" panose="020B0604020202020204"/>
-            </a:endParaRPr>
           </a:p>
         </p:txBody>
       </p:sp>
@@ -12706,12 +12954,6 @@
               </a:rPr>
               <a:t>Observe</a:t>
             </a:r>
-            <a:endParaRPr sz="1200" b="1">
-              <a:solidFill>
-                <a:srgbClr val="16223C"/>
-              </a:solidFill>
-              <a:latin typeface="Arial" panose="020B0604020202020204"/>
-            </a:endParaRPr>
           </a:p>
         </p:txBody>
       </p:sp>
@@ -12766,12 +13008,6 @@
               </a:rPr>
               <a:t>Replan</a:t>
             </a:r>
-            <a:endParaRPr sz="1200" b="1">
-              <a:solidFill>
-                <a:srgbClr val="16223C"/>
-              </a:solidFill>
-              <a:latin typeface="Arial" panose="020B0604020202020204"/>
-            </a:endParaRPr>
           </a:p>
         </p:txBody>
       </p:sp>
@@ -12826,12 +13062,6 @@
               </a:rPr>
               <a:t>Verify</a:t>
             </a:r>
-            <a:endParaRPr sz="1200" b="1">
-              <a:solidFill>
-                <a:srgbClr val="16223C"/>
-              </a:solidFill>
-              <a:latin typeface="Arial" panose="020B0604020202020204"/>
-            </a:endParaRPr>
           </a:p>
         </p:txBody>
       </p:sp>
@@ -12867,12 +13097,6 @@
               </a:rPr>
               <a:t>Track requirement: BUILD THE BRAIN, NOT THE PUPPET — the agent adapts from observations rather than following a predetermined script.</a:t>
             </a:r>
-            <a:endParaRPr sz="1000" b="1">
-              <a:solidFill>
-                <a:srgbClr val="16223C"/>
-              </a:solidFill>
-              <a:latin typeface="Arial" panose="020B0604020202020204"/>
-            </a:endParaRPr>
           </a:p>
         </p:txBody>
       </p:sp>
@@ -12889,7 +13113,7 @@
   <p:cSld>
     <p:spTree>
       <p:nvGrpSpPr>
-        <p:cNvPr id="99" name="Shape 99"/>
+        <p:cNvPr id="1" name="Shape 99"/>
         <p:cNvGrpSpPr/>
         <p:nvPr/>
       </p:nvGrpSpPr>
@@ -12933,12 +13157,6 @@
               </a:rPr>
               <a:t>Technical Architecture</a:t>
             </a:r>
-            <a:endParaRPr sz="3100" b="1">
-              <a:solidFill>
-                <a:srgbClr val="0A0A0C"/>
-              </a:solidFill>
-              <a:latin typeface="Arial" panose="020B0604020202020204"/>
-            </a:endParaRPr>
           </a:p>
         </p:txBody>
       </p:sp>
@@ -12982,6 +13200,7 @@
           <a:lstStyle/>
           <a:p>
             <a:pPr algn="ctr"/>
+            <a:endParaRPr/>
           </a:p>
         </p:txBody>
       </p:sp>
@@ -13017,12 +13236,6 @@
               </a:rPr>
               <a:t>STACK</a:t>
             </a:r>
-            <a:endParaRPr sz="1100" b="1">
-              <a:solidFill>
-                <a:srgbClr val="5B6370"/>
-              </a:solidFill>
-              <a:latin typeface="Arial" panose="020B0604020202020204"/>
-            </a:endParaRPr>
           </a:p>
         </p:txBody>
       </p:sp>
@@ -13109,12 +13322,6 @@
               </a:rPr>
               <a:t>Frontend</a:t>
             </a:r>
-            <a:endParaRPr sz="1100" b="1">
-              <a:solidFill>
-                <a:srgbClr val="16223C"/>
-              </a:solidFill>
-              <a:latin typeface="Arial" panose="020B0604020202020204"/>
-            </a:endParaRPr>
           </a:p>
         </p:txBody>
       </p:sp>
@@ -13150,12 +13357,6 @@
               </a:rPr>
               <a:t>React / Vite</a:t>
             </a:r>
-            <a:endParaRPr sz="1100" b="0">
-              <a:solidFill>
-                <a:srgbClr val="0A0A0C"/>
-              </a:solidFill>
-              <a:latin typeface="Arial" panose="020B0604020202020204"/>
-            </a:endParaRPr>
           </a:p>
         </p:txBody>
       </p:sp>
@@ -13242,12 +13443,6 @@
               </a:rPr>
               <a:t>API</a:t>
             </a:r>
-            <a:endParaRPr sz="1100" b="1">
-              <a:solidFill>
-                <a:srgbClr val="16223C"/>
-              </a:solidFill>
-              <a:latin typeface="Arial" panose="020B0604020202020204"/>
-            </a:endParaRPr>
           </a:p>
         </p:txBody>
       </p:sp>
@@ -13283,12 +13478,6 @@
               </a:rPr>
               <a:t>FastAPI + Pydantic</a:t>
             </a:r>
-            <a:endParaRPr sz="1100" b="0">
-              <a:solidFill>
-                <a:srgbClr val="0A0A0C"/>
-              </a:solidFill>
-              <a:latin typeface="Arial" panose="020B0604020202020204"/>
-            </a:endParaRPr>
           </a:p>
         </p:txBody>
       </p:sp>
@@ -13375,12 +13564,6 @@
               </a:rPr>
               <a:t>Agent</a:t>
             </a:r>
-            <a:endParaRPr sz="1100" b="1">
-              <a:solidFill>
-                <a:srgbClr val="16223C"/>
-              </a:solidFill>
-              <a:latin typeface="Arial" panose="020B0604020202020204"/>
-            </a:endParaRPr>
           </a:p>
         </p:txBody>
       </p:sp>
@@ -13416,12 +13599,6 @@
               </a:rPr>
               <a:t>AgentCore + LLM interface</a:t>
             </a:r>
-            <a:endParaRPr sz="1100" b="0">
-              <a:solidFill>
-                <a:srgbClr val="0A0A0C"/>
-              </a:solidFill>
-              <a:latin typeface="Arial" panose="020B0604020202020204"/>
-            </a:endParaRPr>
           </a:p>
         </p:txBody>
       </p:sp>
@@ -13508,12 +13685,6 @@
               </a:rPr>
               <a:t>Tools</a:t>
             </a:r>
-            <a:endParaRPr sz="1100" b="1">
-              <a:solidFill>
-                <a:srgbClr val="16223C"/>
-              </a:solidFill>
-              <a:latin typeface="Arial" panose="020B0604020202020204"/>
-            </a:endParaRPr>
           </a:p>
         </p:txBody>
       </p:sp>
@@ -13549,12 +13720,6 @@
               </a:rPr>
               <a:t>File • Shell • Search • Calculator</a:t>
             </a:r>
-            <a:endParaRPr sz="1100" b="0">
-              <a:solidFill>
-                <a:srgbClr val="0A0A0C"/>
-              </a:solidFill>
-              <a:latin typeface="Arial" panose="020B0604020202020204"/>
-            </a:endParaRPr>
           </a:p>
         </p:txBody>
       </p:sp>
@@ -13641,12 +13806,6 @@
               </a:rPr>
               <a:t>Testing</a:t>
             </a:r>
-            <a:endParaRPr sz="1100" b="1">
-              <a:solidFill>
-                <a:srgbClr val="16223C"/>
-              </a:solidFill>
-              <a:latin typeface="Arial" panose="020B0604020202020204"/>
-            </a:endParaRPr>
           </a:p>
         </p:txBody>
       </p:sp>
@@ -13682,12 +13841,6 @@
               </a:rPr>
               <a:t>Pytest + integration tests</a:t>
             </a:r>
-            <a:endParaRPr sz="1100" b="0">
-              <a:solidFill>
-                <a:srgbClr val="0A0A0C"/>
-              </a:solidFill>
-              <a:latin typeface="Arial" panose="020B0604020202020204"/>
-            </a:endParaRPr>
           </a:p>
         </p:txBody>
       </p:sp>
@@ -13723,12 +13876,6 @@
               </a:rPr>
               <a:t>DATA FLOW</a:t>
             </a:r>
-            <a:endParaRPr sz="1100" b="1">
-              <a:solidFill>
-                <a:srgbClr val="5B6370"/>
-              </a:solidFill>
-              <a:latin typeface="Arial" panose="020B0604020202020204"/>
-            </a:endParaRPr>
           </a:p>
         </p:txBody>
       </p:sp>
@@ -13783,12 +13930,6 @@
               </a:rPr>
               <a:t>User task</a:t>
             </a:r>
-            <a:endParaRPr sz="1200" b="0">
-              <a:solidFill>
-                <a:srgbClr val="0A0A0C"/>
-              </a:solidFill>
-              <a:latin typeface="Arial" panose="020B0604020202020204"/>
-            </a:endParaRPr>
           </a:p>
         </p:txBody>
       </p:sp>
@@ -13878,12 +14019,6 @@
               </a:rPr>
               <a:t>FastAPI</a:t>
             </a:r>
-            <a:endParaRPr sz="1200" b="0">
-              <a:solidFill>
-                <a:srgbClr val="0A0A0C"/>
-              </a:solidFill>
-              <a:latin typeface="Arial" panose="020B0604020202020204"/>
-            </a:endParaRPr>
           </a:p>
         </p:txBody>
       </p:sp>
@@ -13973,12 +14108,6 @@
               </a:rPr>
               <a:t>AgentCore</a:t>
             </a:r>
-            <a:endParaRPr sz="1200" b="1">
-              <a:solidFill>
-                <a:srgbClr val="0A0A0C"/>
-              </a:solidFill>
-              <a:latin typeface="Arial" panose="020B0604020202020204"/>
-            </a:endParaRPr>
           </a:p>
         </p:txBody>
       </p:sp>
@@ -14068,12 +14197,6 @@
               </a:rPr>
               <a:t>Tool Registry</a:t>
             </a:r>
-            <a:endParaRPr sz="1200" b="0">
-              <a:solidFill>
-                <a:srgbClr val="0A0A0C"/>
-              </a:solidFill>
-              <a:latin typeface="Arial" panose="020B0604020202020204"/>
-            </a:endParaRPr>
           </a:p>
         </p:txBody>
       </p:sp>
@@ -14163,12 +14286,6 @@
               </a:rPr>
               <a:t>Tool result / observation</a:t>
             </a:r>
-            <a:endParaRPr sz="1200" b="1">
-              <a:solidFill>
-                <a:srgbClr val="0A0A0C"/>
-              </a:solidFill>
-              <a:latin typeface="Arial" panose="020B0604020202020204"/>
-            </a:endParaRPr>
           </a:p>
         </p:txBody>
       </p:sp>
@@ -14258,12 +14375,6 @@
               </a:rPr>
               <a:t>Next action or final result</a:t>
             </a:r>
-            <a:endParaRPr sz="1200" b="0">
-              <a:solidFill>
-                <a:srgbClr val="0A0A0C"/>
-              </a:solidFill>
-              <a:latin typeface="Arial" panose="020B0604020202020204"/>
-            </a:endParaRPr>
           </a:p>
         </p:txBody>
       </p:sp>
@@ -14299,12 +14410,6 @@
               </a:rPr>
               <a:t>Agent modules: Planner • Memory • Parser • Tool Registry • Events  |  Demo repos: broken-login • broken-python • broken-api</a:t>
             </a:r>
-            <a:endParaRPr sz="1100" b="0">
-              <a:solidFill>
-                <a:srgbClr val="5B6370"/>
-              </a:solidFill>
-              <a:latin typeface="Arial" panose="020B0604020202020204"/>
-            </a:endParaRPr>
           </a:p>
         </p:txBody>
       </p:sp>
@@ -14321,7 +14426,7 @@
   <p:cSld>
     <p:spTree>
       <p:nvGrpSpPr>
-        <p:cNvPr id="105" name="Shape 105"/>
+        <p:cNvPr id="1" name="Shape 105"/>
         <p:cNvGrpSpPr/>
         <p:nvPr/>
       </p:nvGrpSpPr>
@@ -14365,12 +14470,6 @@
               </a:rPr>
               <a:t>Proposed Solution</a:t>
             </a:r>
-            <a:endParaRPr sz="3100" b="1">
-              <a:solidFill>
-                <a:srgbClr val="0A0A0C"/>
-              </a:solidFill>
-              <a:latin typeface="Arial" panose="020B0604020202020204"/>
-            </a:endParaRPr>
           </a:p>
         </p:txBody>
       </p:sp>
@@ -14414,6 +14513,7 @@
           <a:lstStyle/>
           <a:p>
             <a:pPr algn="ctr"/>
+            <a:endParaRPr/>
           </a:p>
         </p:txBody>
       </p:sp>
@@ -14449,12 +14549,6 @@
               </a:rPr>
               <a:t>RepoPilot is an autonomous AI software debugging engineer that investigates repositories, selects tools, observes results, recovers from failures, and verifies a solution.</a:t>
             </a:r>
-            <a:endParaRPr sz="1700" b="0">
-              <a:solidFill>
-                <a:srgbClr val="0A0A0C"/>
-              </a:solidFill>
-              <a:latin typeface="Arial" panose="020B0604020202020204"/>
-            </a:endParaRPr>
           </a:p>
         </p:txBody>
       </p:sp>
@@ -14509,12 +14603,6 @@
               </a:rPr>
               <a:t>TASK</a:t>
             </a:r>
-            <a:endParaRPr sz="1100" b="1">
-              <a:solidFill>
-                <a:srgbClr val="16223C"/>
-              </a:solidFill>
-              <a:latin typeface="Arial" panose="020B0604020202020204"/>
-            </a:endParaRPr>
           </a:p>
         </p:txBody>
       </p:sp>
@@ -14604,12 +14692,6 @@
               </a:rPr>
               <a:t>PLAN</a:t>
             </a:r>
-            <a:endParaRPr sz="1100" b="1">
-              <a:solidFill>
-                <a:srgbClr val="16223C"/>
-              </a:solidFill>
-              <a:latin typeface="Arial" panose="020B0604020202020204"/>
-            </a:endParaRPr>
           </a:p>
         </p:txBody>
       </p:sp>
@@ -14699,12 +14781,6 @@
               </a:rPr>
               <a:t>ACT</a:t>
             </a:r>
-            <a:endParaRPr sz="1100" b="1">
-              <a:solidFill>
-                <a:srgbClr val="16223C"/>
-              </a:solidFill>
-              <a:latin typeface="Arial" panose="020B0604020202020204"/>
-            </a:endParaRPr>
           </a:p>
         </p:txBody>
       </p:sp>
@@ -14794,12 +14870,6 @@
               </a:rPr>
               <a:t>OBSERVE</a:t>
             </a:r>
-            <a:endParaRPr sz="1100" b="1">
-              <a:solidFill>
-                <a:srgbClr val="16223C"/>
-              </a:solidFill>
-              <a:latin typeface="Arial" panose="020B0604020202020204"/>
-            </a:endParaRPr>
           </a:p>
         </p:txBody>
       </p:sp>
@@ -14889,12 +14959,6 @@
               </a:rPr>
               <a:t>REFLECT</a:t>
             </a:r>
-            <a:endParaRPr sz="1100" b="1">
-              <a:solidFill>
-                <a:srgbClr val="16223C"/>
-              </a:solidFill>
-              <a:latin typeface="Arial" panose="020B0604020202020204"/>
-            </a:endParaRPr>
           </a:p>
         </p:txBody>
       </p:sp>
@@ -14984,12 +15048,6 @@
               </a:rPr>
               <a:t>REPLAN</a:t>
             </a:r>
-            <a:endParaRPr sz="1100" b="1">
-              <a:solidFill>
-                <a:srgbClr val="16223C"/>
-              </a:solidFill>
-              <a:latin typeface="Arial" panose="020B0604020202020204"/>
-            </a:endParaRPr>
           </a:p>
         </p:txBody>
       </p:sp>
@@ -15079,12 +15137,6 @@
               </a:rPr>
               <a:t>VERIFY</a:t>
             </a:r>
-            <a:endParaRPr sz="1100" b="1">
-              <a:solidFill>
-                <a:srgbClr val="16223C"/>
-              </a:solidFill>
-              <a:latin typeface="Arial" panose="020B0604020202020204"/>
-            </a:endParaRPr>
           </a:p>
         </p:txBody>
       </p:sp>
@@ -15174,12 +15226,6 @@
               </a:rPr>
               <a:t>RESULT</a:t>
             </a:r>
-            <a:endParaRPr sz="1100" b="1">
-              <a:solidFill>
-                <a:srgbClr val="16223C"/>
-              </a:solidFill>
-              <a:latin typeface="Arial" panose="020B0604020202020204"/>
-            </a:endParaRPr>
           </a:p>
         </p:txBody>
       </p:sp>
@@ -15215,12 +15261,6 @@
               </a:rPr>
               <a:t>KEY DIFFERENTIATOR</a:t>
             </a:r>
-            <a:endParaRPr sz="1100" b="1">
-              <a:solidFill>
-                <a:srgbClr val="D2232A"/>
-              </a:solidFill>
-              <a:latin typeface="Arial" panose="020B0604020202020204"/>
-            </a:endParaRPr>
           </a:p>
         </p:txBody>
       </p:sp>
@@ -15275,12 +15315,6 @@
               </a:rPr>
               <a:t>The next action is chosen from what the agent observes — not from a hardcoded debugging sequence.</a:t>
             </a:r>
-            <a:endParaRPr sz="1600" b="1">
-              <a:solidFill>
-                <a:srgbClr val="0A0A0C"/>
-              </a:solidFill>
-              <a:latin typeface="Arial" panose="020B0604020202020204"/>
-            </a:endParaRPr>
           </a:p>
         </p:txBody>
       </p:sp>
@@ -15316,12 +15350,6 @@
               </a:rPr>
               <a:t>WHAT THE USER SEES</a:t>
             </a:r>
-            <a:endParaRPr sz="1100" b="1">
-              <a:solidFill>
-                <a:srgbClr val="16223C"/>
-              </a:solidFill>
-              <a:latin typeface="Arial" panose="020B0604020202020204"/>
-            </a:endParaRPr>
           </a:p>
         </p:txBody>
       </p:sp>
@@ -15408,12 +15436,6 @@
               </a:rPr>
               <a:t>Trace</a:t>
             </a:r>
-            <a:endParaRPr sz="1100" b="1">
-              <a:solidFill>
-                <a:srgbClr val="16223C"/>
-              </a:solidFill>
-              <a:latin typeface="Arial" panose="020B0604020202020204"/>
-            </a:endParaRPr>
           </a:p>
         </p:txBody>
       </p:sp>
@@ -15449,12 +15471,6 @@
               </a:rPr>
               <a:t>Plan / tool / observation events</a:t>
             </a:r>
-            <a:endParaRPr sz="1100" b="0">
-              <a:solidFill>
-                <a:srgbClr val="0A0A0C"/>
-              </a:solidFill>
-              <a:latin typeface="Arial" panose="020B0604020202020204"/>
-            </a:endParaRPr>
           </a:p>
         </p:txBody>
       </p:sp>
@@ -15541,12 +15557,6 @@
               </a:rPr>
               <a:t>Recovery</a:t>
             </a:r>
-            <a:endParaRPr sz="1100" b="1">
-              <a:solidFill>
-                <a:srgbClr val="16223C"/>
-              </a:solidFill>
-              <a:latin typeface="Arial" panose="020B0604020202020204"/>
-            </a:endParaRPr>
           </a:p>
         </p:txBody>
       </p:sp>
@@ -15582,12 +15592,6 @@
               </a:rPr>
               <a:t>Failure → reflection → replan</a:t>
             </a:r>
-            <a:endParaRPr sz="1100" b="0">
-              <a:solidFill>
-                <a:srgbClr val="0A0A0C"/>
-              </a:solidFill>
-              <a:latin typeface="Arial" panose="020B0604020202020204"/>
-            </a:endParaRPr>
           </a:p>
         </p:txBody>
       </p:sp>
@@ -15674,12 +15678,6 @@
               </a:rPr>
               <a:t>Verification</a:t>
             </a:r>
-            <a:endParaRPr sz="1100" b="1">
-              <a:solidFill>
-                <a:srgbClr val="16223C"/>
-              </a:solidFill>
-              <a:latin typeface="Arial" panose="020B0604020202020204"/>
-            </a:endParaRPr>
           </a:p>
         </p:txBody>
       </p:sp>
@@ -15715,12 +15713,6 @@
               </a:rPr>
               <a:t>Tests / checks before final result</a:t>
             </a:r>
-            <a:endParaRPr sz="1100" b="0">
-              <a:solidFill>
-                <a:srgbClr val="0A0A0C"/>
-              </a:solidFill>
-              <a:latin typeface="Arial" panose="020B0604020202020204"/>
-            </a:endParaRPr>
           </a:p>
         </p:txBody>
       </p:sp>
@@ -15745,7 +15737,7 @@
     </p:bg>
     <p:spTree>
       <p:nvGrpSpPr>
-        <p:cNvPr id="111" name="Shape 111"/>
+        <p:cNvPr id="1" name="Shape 111"/>
         <p:cNvGrpSpPr/>
         <p:nvPr/>
       </p:nvGrpSpPr>
@@ -15789,12 +15781,6 @@
               </a:rPr>
               <a:t>Innovation &amp; Novelty</a:t>
             </a:r>
-            <a:endParaRPr sz="3100" b="1">
-              <a:solidFill>
-                <a:srgbClr val="0A0A0C"/>
-              </a:solidFill>
-              <a:latin typeface="Arial" panose="020B0604020202020204"/>
-            </a:endParaRPr>
           </a:p>
         </p:txBody>
       </p:sp>
@@ -15838,6 +15824,7 @@
           <a:lstStyle/>
           <a:p>
             <a:pPr algn="ctr"/>
+            <a:endParaRPr/>
           </a:p>
         </p:txBody>
       </p:sp>
@@ -15924,12 +15911,6 @@
               </a:rPr>
               <a:t>01</a:t>
             </a:r>
-            <a:endParaRPr sz="1100" b="1">
-              <a:solidFill>
-                <a:srgbClr val="D2232A"/>
-              </a:solidFill>
-              <a:latin typeface="Arial" panose="020B0604020202020204"/>
-            </a:endParaRPr>
           </a:p>
         </p:txBody>
       </p:sp>
@@ -15965,12 +15946,6 @@
               </a:rPr>
               <a:t>AUTONOMOUS TOOL SELECTION</a:t>
             </a:r>
-            <a:endParaRPr sz="1200" b="1">
-              <a:solidFill>
-                <a:srgbClr val="16223C"/>
-              </a:solidFill>
-              <a:latin typeface="Arial" panose="020B0604020202020204"/>
-            </a:endParaRPr>
           </a:p>
         </p:txBody>
       </p:sp>
@@ -16006,12 +15981,6 @@
               </a:rPr>
               <a:t>Chooses among available tools based on the current debugging state.</a:t>
             </a:r>
-            <a:endParaRPr sz="1100" b="0">
-              <a:solidFill>
-                <a:srgbClr val="0A0A0C"/>
-              </a:solidFill>
-              <a:latin typeface="Arial" panose="020B0604020202020204"/>
-            </a:endParaRPr>
           </a:p>
         </p:txBody>
       </p:sp>
@@ -16098,12 +16067,6 @@
               </a:rPr>
               <a:t>02</a:t>
             </a:r>
-            <a:endParaRPr sz="1100" b="1">
-              <a:solidFill>
-                <a:srgbClr val="D2232A"/>
-              </a:solidFill>
-              <a:latin typeface="Arial" panose="020B0604020202020204"/>
-            </a:endParaRPr>
           </a:p>
         </p:txBody>
       </p:sp>
@@ -16139,12 +16102,6 @@
               </a:rPr>
               <a:t>OBSERVATION-DRIVEN REASONING</a:t>
             </a:r>
-            <a:endParaRPr sz="1200" b="1">
-              <a:solidFill>
-                <a:srgbClr val="16223C"/>
-              </a:solidFill>
-              <a:latin typeface="Arial" panose="020B0604020202020204"/>
-            </a:endParaRPr>
           </a:p>
         </p:txBody>
       </p:sp>
@@ -16180,12 +16137,6 @@
               </a:rPr>
               <a:t>Tool outputs become evidence for the next decision.</a:t>
             </a:r>
-            <a:endParaRPr sz="1100" b="0">
-              <a:solidFill>
-                <a:srgbClr val="0A0A0C"/>
-              </a:solidFill>
-              <a:latin typeface="Arial" panose="020B0604020202020204"/>
-            </a:endParaRPr>
           </a:p>
         </p:txBody>
       </p:sp>
@@ -16272,12 +16223,6 @@
               </a:rPr>
               <a:t>03</a:t>
             </a:r>
-            <a:endParaRPr sz="1100" b="1">
-              <a:solidFill>
-                <a:srgbClr val="D2232A"/>
-              </a:solidFill>
-              <a:latin typeface="Arial" panose="020B0604020202020204"/>
-            </a:endParaRPr>
           </a:p>
         </p:txBody>
       </p:sp>
@@ -16313,12 +16258,6 @@
               </a:rPr>
               <a:t>FAILURE → REFLECTION → REPLAN</a:t>
             </a:r>
-            <a:endParaRPr sz="1200" b="1">
-              <a:solidFill>
-                <a:srgbClr val="16223C"/>
-              </a:solidFill>
-              <a:latin typeface="Arial" panose="020B0604020202020204"/>
-            </a:endParaRPr>
           </a:p>
         </p:txBody>
       </p:sp>
@@ -16354,12 +16293,6 @@
               </a:rPr>
               <a:t>Unexpected results trigger adaptation instead of simple termination.</a:t>
             </a:r>
-            <a:endParaRPr sz="1100" b="0">
-              <a:solidFill>
-                <a:srgbClr val="0A0A0C"/>
-              </a:solidFill>
-              <a:latin typeface="Arial" panose="020B0604020202020204"/>
-            </a:endParaRPr>
           </a:p>
         </p:txBody>
       </p:sp>
@@ -16446,12 +16379,6 @@
               </a:rPr>
               <a:t>04</a:t>
             </a:r>
-            <a:endParaRPr sz="1100" b="1">
-              <a:solidFill>
-                <a:srgbClr val="D2232A"/>
-              </a:solidFill>
-              <a:latin typeface="Arial" panose="020B0604020202020204"/>
-            </a:endParaRPr>
           </a:p>
         </p:txBody>
       </p:sp>
@@ -16487,12 +16414,6 @@
               </a:rPr>
               <a:t>FROM SCRIPT TO AGENT</a:t>
             </a:r>
-            <a:endParaRPr sz="1200" b="1">
-              <a:solidFill>
-                <a:srgbClr val="16223C"/>
-              </a:solidFill>
-              <a:latin typeface="Arial" panose="020B0604020202020204"/>
-            </a:endParaRPr>
           </a:p>
         </p:txBody>
       </p:sp>
@@ -16528,12 +16449,6 @@
               </a:rPr>
               <a:t>The core abstraction is an OODA-style loop, not a fixed command chain.</a:t>
             </a:r>
-            <a:endParaRPr sz="1100" b="0">
-              <a:solidFill>
-                <a:srgbClr val="0A0A0C"/>
-              </a:solidFill>
-              <a:latin typeface="Arial" panose="020B0604020202020204"/>
-            </a:endParaRPr>
           </a:p>
         </p:txBody>
       </p:sp>
@@ -16569,12 +16484,6 @@
               </a:rPr>
               <a:t>AUTOMATION  A → B → C     |     REPΟPILOT  OBSERVE → DECIDE → ACT → ADAPT</a:t>
             </a:r>
-            <a:endParaRPr sz="1200" b="1">
-              <a:solidFill>
-                <a:srgbClr val="D2232A"/>
-              </a:solidFill>
-              <a:latin typeface="Arial" panose="020B0604020202020204"/>
-            </a:endParaRPr>
           </a:p>
         </p:txBody>
       </p:sp>
@@ -16599,7 +16508,7 @@
     </p:bg>
     <p:spTree>
       <p:nvGrpSpPr>
-        <p:cNvPr id="117" name="Shape 117"/>
+        <p:cNvPr id="1" name="Shape 117"/>
         <p:cNvGrpSpPr/>
         <p:nvPr/>
       </p:nvGrpSpPr>
@@ -16643,12 +16552,6 @@
               </a:rPr>
               <a:t>Impact &amp; Benefits</a:t>
             </a:r>
-            <a:endParaRPr sz="3100" b="1">
-              <a:solidFill>
-                <a:srgbClr val="0A0A0C"/>
-              </a:solidFill>
-              <a:latin typeface="Arial" panose="020B0604020202020204"/>
-            </a:endParaRPr>
           </a:p>
         </p:txBody>
       </p:sp>
@@ -16692,6 +16595,7 @@
           <a:lstStyle/>
           <a:p>
             <a:pPr algn="ctr"/>
+            <a:endParaRPr/>
           </a:p>
         </p:txBody>
       </p:sp>
@@ -16727,12 +16631,6 @@
               </a:rPr>
               <a:t>CURRENT PROTOTYPE SCOPE</a:t>
             </a:r>
-            <a:endParaRPr sz="1100" b="1">
-              <a:solidFill>
-                <a:srgbClr val="5B6370"/>
-              </a:solidFill>
-              <a:latin typeface="Arial" panose="020B0604020202020204"/>
-            </a:endParaRPr>
           </a:p>
         </p:txBody>
       </p:sp>
@@ -16819,12 +16717,6 @@
               </a:rPr>
               <a:t>3</a:t>
             </a:r>
-            <a:endParaRPr sz="2300" b="1">
-              <a:solidFill>
-                <a:srgbClr val="D2232A"/>
-              </a:solidFill>
-              <a:latin typeface="Arial" panose="020B0604020202020204"/>
-            </a:endParaRPr>
           </a:p>
         </p:txBody>
       </p:sp>
@@ -16860,12 +16752,6 @@
               </a:rPr>
               <a:t>demo repository types</a:t>
             </a:r>
-            <a:endParaRPr sz="1100" b="1">
-              <a:solidFill>
-                <a:srgbClr val="0A0A0C"/>
-              </a:solidFill>
-              <a:latin typeface="Arial" panose="020B0604020202020204"/>
-            </a:endParaRPr>
           </a:p>
         </p:txBody>
       </p:sp>
@@ -16952,12 +16838,6 @@
               </a:rPr>
               <a:t>3</a:t>
             </a:r>
-            <a:endParaRPr sz="2300" b="1">
-              <a:solidFill>
-                <a:srgbClr val="D2232A"/>
-              </a:solidFill>
-              <a:latin typeface="Arial" panose="020B0604020202020204"/>
-            </a:endParaRPr>
           </a:p>
         </p:txBody>
       </p:sp>
@@ -16993,12 +16873,6 @@
               </a:rPr>
               <a:t>demo scenarios</a:t>
             </a:r>
-            <a:endParaRPr sz="1100" b="1">
-              <a:solidFill>
-                <a:srgbClr val="0A0A0C"/>
-              </a:solidFill>
-              <a:latin typeface="Arial" panose="020B0604020202020204"/>
-            </a:endParaRPr>
           </a:p>
         </p:txBody>
       </p:sp>
@@ -17085,12 +16959,6 @@
               </a:rPr>
               <a:t>4</a:t>
             </a:r>
-            <a:endParaRPr sz="2300" b="1">
-              <a:solidFill>
-                <a:srgbClr val="D2232A"/>
-              </a:solidFill>
-              <a:latin typeface="Arial" panose="020B0604020202020204"/>
-            </a:endParaRPr>
           </a:p>
         </p:txBody>
       </p:sp>
@@ -17126,12 +16994,6 @@
               </a:rPr>
               <a:t>tool classes</a:t>
             </a:r>
-            <a:endParaRPr sz="1100" b="1">
-              <a:solidFill>
-                <a:srgbClr val="0A0A0C"/>
-              </a:solidFill>
-              <a:latin typeface="Arial" panose="020B0604020202020204"/>
-            </a:endParaRPr>
           </a:p>
         </p:txBody>
       </p:sp>
@@ -17218,12 +17080,6 @@
               </a:rPr>
               <a:t>1</a:t>
             </a:r>
-            <a:endParaRPr sz="2300" b="1">
-              <a:solidFill>
-                <a:srgbClr val="D2232A"/>
-              </a:solidFill>
-              <a:latin typeface="Arial" panose="020B0604020202020204"/>
-            </a:endParaRPr>
           </a:p>
         </p:txBody>
       </p:sp>
@@ -17259,12 +17115,6 @@
               </a:rPr>
               <a:t>adaptive agent loop</a:t>
             </a:r>
-            <a:endParaRPr sz="1100" b="1">
-              <a:solidFill>
-                <a:srgbClr val="0A0A0C"/>
-              </a:solidFill>
-              <a:latin typeface="Arial" panose="020B0604020202020204"/>
-            </a:endParaRPr>
           </a:p>
         </p:txBody>
       </p:sp>
@@ -17300,12 +17150,6 @@
               </a:rPr>
               <a:t>WHO BENEFITS</a:t>
             </a:r>
-            <a:endParaRPr sz="1100" b="1">
-              <a:solidFill>
-                <a:srgbClr val="5B6370"/>
-              </a:solidFill>
-              <a:latin typeface="Arial" panose="020B0604020202020204"/>
-            </a:endParaRPr>
           </a:p>
         </p:txBody>
       </p:sp>
@@ -17392,12 +17236,6 @@
               </a:rPr>
               <a:t>Developers</a:t>
             </a:r>
-            <a:endParaRPr sz="1100" b="1">
-              <a:solidFill>
-                <a:srgbClr val="16223C"/>
-              </a:solidFill>
-              <a:latin typeface="Arial" panose="020B0604020202020204"/>
-            </a:endParaRPr>
           </a:p>
         </p:txBody>
       </p:sp>
@@ -17433,12 +17271,6 @@
               </a:rPr>
               <a:t>Less manual investigation and clearer debugging evidence.</a:t>
             </a:r>
-            <a:endParaRPr sz="1100" b="0">
-              <a:solidFill>
-                <a:srgbClr val="0A0A0C"/>
-              </a:solidFill>
-              <a:latin typeface="Arial" panose="020B0604020202020204"/>
-            </a:endParaRPr>
           </a:p>
         </p:txBody>
       </p:sp>
@@ -17525,12 +17357,6 @@
               </a:rPr>
               <a:t>Engineering teams</a:t>
             </a:r>
-            <a:endParaRPr sz="1100" b="1">
-              <a:solidFill>
-                <a:srgbClr val="16223C"/>
-              </a:solidFill>
-              <a:latin typeface="Arial" panose="020B0604020202020204"/>
-            </a:endParaRPr>
           </a:p>
         </p:txBody>
       </p:sp>
@@ -17566,12 +17392,6 @@
               </a:rPr>
               <a:t>Repeatable tool-assisted investigation with visible execution history.</a:t>
             </a:r>
-            <a:endParaRPr sz="1100" b="0">
-              <a:solidFill>
-                <a:srgbClr val="0A0A0C"/>
-              </a:solidFill>
-              <a:latin typeface="Arial" panose="020B0604020202020204"/>
-            </a:endParaRPr>
           </a:p>
         </p:txBody>
       </p:sp>
@@ -17658,12 +17478,6 @@
               </a:rPr>
               <a:t>Agent builders</a:t>
             </a:r>
-            <a:endParaRPr sz="1100" b="1">
-              <a:solidFill>
-                <a:srgbClr val="16223C"/>
-              </a:solidFill>
-              <a:latin typeface="Arial" panose="020B0604020202020204"/>
-            </a:endParaRPr>
           </a:p>
         </p:txBody>
       </p:sp>
@@ -17699,12 +17513,6 @@
               </a:rPr>
               <a:t>A concrete example of autonomous planning, observation and recovery.</a:t>
             </a:r>
-            <a:endParaRPr sz="1100" b="0">
-              <a:solidFill>
-                <a:srgbClr val="0A0A0C"/>
-              </a:solidFill>
-              <a:latin typeface="Arial" panose="020B0604020202020204"/>
-            </a:endParaRPr>
           </a:p>
         </p:txBody>
       </p:sp>
@@ -17759,12 +17567,6 @@
               </a:rPr>
               <a:t>Impact claim: RepoPilot targets reduced repetitive debugging effort and faster evidence gathering. No unmeasured productivity percentages are claimed.</a:t>
             </a:r>
-            <a:endParaRPr sz="1000" b="1">
-              <a:solidFill>
-                <a:srgbClr val="0A0A0C"/>
-              </a:solidFill>
-              <a:latin typeface="Arial" panose="020B0604020202020204"/>
-            </a:endParaRPr>
           </a:p>
         </p:txBody>
       </p:sp>
@@ -17800,12 +17602,6 @@
               </a:rPr>
               <a:t>SDG relevance: SDG 9 — Industry, Innovation &amp; Infrastructure (software innovation / developer infrastructure).</a:t>
             </a:r>
-            <a:endParaRPr sz="1000" b="0">
-              <a:solidFill>
-                <a:srgbClr val="5B6370"/>
-              </a:solidFill>
-              <a:latin typeface="Arial" panose="020B0604020202020204"/>
-            </a:endParaRPr>
           </a:p>
         </p:txBody>
       </p:sp>
@@ -18093,6 +17889,8 @@
       </a:bgFillStyleLst>
     </a:fmtScheme>
   </a:themeElements>
+  <a:objectDefaults/>
+  <a:extraClrSchemeLst/>
   <a:extLst>
     <a:ext uri="{05A4C25C-085E-4340-85A3-A5531E510DB2}">
       <thm15:themeFamily xmlns:thm15="http://schemas.microsoft.com/office/thememl/2012/main" name="Office Theme" id="{62F939B6-93AF-4DB8-9C6B-D6C7DFDC589F}" vid="{4A3C46E8-61CC-4603-A589-7422A47A8E4A}"/>
@@ -18377,6 +18175,8 @@
       </a:bgFillStyleLst>
     </a:fmtScheme>
   </a:themeElements>
+  <a:objectDefaults/>
+  <a:extraClrSchemeLst/>
   <a:extLst>
     <a:ext uri="{05A4C25C-085E-4340-85A3-A5531E510DB2}">
       <thm15:themeFamily xmlns:thm15="http://schemas.microsoft.com/office/thememl/2012/main" name="Office Theme" id="{62F939B6-93AF-4DB8-9C6B-D6C7DFDC589F}" vid="{4A3C46E8-61CC-4603-A589-7422A47A8E4A}"/>

--- a/docs/RepoPilot_Epchoesque2_PitchDeck_new.pptx
+++ b/docs/RepoPilot_Epchoesque2_PitchDeck_new.pptx
@@ -266,19 +266,19 @@
 <pc:chgInfo xmlns:a="http://schemas.openxmlformats.org/drawingml/2006/main" xmlns:r="http://schemas.openxmlformats.org/officeDocument/2006/relationships" xmlns:ac="http://schemas.microsoft.com/office/drawing/2013/main/command" xmlns:pc="http://schemas.microsoft.com/office/powerpoint/2013/main/command">
   <pc:docChgLst>
     <pc:chgData name="Siddhant Asati" userId="f714eb6b166d2c65" providerId="LiveId" clId="{2F15454B-8AC4-4A74-A40A-4746D4B03782}"/>
-    <pc:docChg chg="modSld">
-      <pc:chgData name="Siddhant Asati" userId="f714eb6b166d2c65" providerId="LiveId" clId="{2F15454B-8AC4-4A74-A40A-4746D4B03782}" dt="2026-09-18T05:43:01.632" v="58" actId="20577"/>
+    <pc:docChg chg="custSel modSld">
+      <pc:chgData name="Siddhant Asati" userId="f714eb6b166d2c65" providerId="LiveId" clId="{2F15454B-8AC4-4A74-A40A-4746D4B03782}" dt="2026-09-18T05:45:40.934" v="113" actId="14100"/>
       <pc:docMkLst>
         <pc:docMk/>
       </pc:docMkLst>
       <pc:sldChg chg="modSp mod">
-        <pc:chgData name="Siddhant Asati" userId="f714eb6b166d2c65" providerId="LiveId" clId="{2F15454B-8AC4-4A74-A40A-4746D4B03782}" dt="2026-09-18T05:43:01.632" v="58" actId="20577"/>
+        <pc:chgData name="Siddhant Asati" userId="f714eb6b166d2c65" providerId="LiveId" clId="{2F15454B-8AC4-4A74-A40A-4746D4B03782}" dt="2026-09-18T05:45:40.934" v="113" actId="14100"/>
         <pc:sldMkLst>
           <pc:docMk/>
           <pc:sldMk cId="0" sldId="256"/>
         </pc:sldMkLst>
         <pc:spChg chg="mod">
-          <ac:chgData name="Siddhant Asati" userId="f714eb6b166d2c65" providerId="LiveId" clId="{2F15454B-8AC4-4A74-A40A-4746D4B03782}" dt="2026-09-18T05:43:01.632" v="58" actId="20577"/>
+          <ac:chgData name="Siddhant Asati" userId="f714eb6b166d2c65" providerId="LiveId" clId="{2F15454B-8AC4-4A74-A40A-4746D4B03782}" dt="2026-09-18T05:45:40.934" v="113" actId="14100"/>
           <ac:spMkLst>
             <pc:docMk/>
             <pc:sldMk cId="0" sldId="256"/>
@@ -11977,8 +11977,8 @@
         </p:nvSpPr>
         <p:spPr>
           <a:xfrm>
-            <a:off x="2286000" y="4828032"/>
-            <a:ext cx="7498079" cy="153888"/>
+            <a:off x="1101214" y="4751762"/>
+            <a:ext cx="9566786" cy="161583"/>
           </a:xfrm>
           <a:prstGeom prst="rect">
             <a:avLst/>
@@ -11993,7 +11993,7 @@
           <a:p>
             <a:pPr algn="ctr"/>
             <a:r>
-              <a:rPr sz="1000" b="0" dirty="0">
+              <a:rPr sz="1050" b="0" dirty="0">
                 <a:solidFill>
                   <a:srgbClr val="5B6370"/>
                 </a:solidFill>
@@ -12002,7 +12002,7 @@
               <a:t>Team: </a:t>
             </a:r>
             <a:r>
-              <a:rPr lang="en-US" sz="1000" dirty="0">
+              <a:rPr lang="en-US" sz="1050" dirty="0">
                 <a:solidFill>
                   <a:srgbClr val="5B6370"/>
                 </a:solidFill>
@@ -12010,7 +12010,7 @@
               <a:t>Aman Tyagi</a:t>
             </a:r>
             <a:r>
-              <a:rPr sz="1000" b="0" dirty="0">
+              <a:rPr sz="1050" b="0" dirty="0">
                 <a:solidFill>
                   <a:srgbClr val="5B6370"/>
                 </a:solidFill>
@@ -12019,7 +12019,7 @@
               <a:t> — Agent Brain  |  </a:t>
             </a:r>
             <a:r>
-              <a:rPr lang="en-US" sz="1000" dirty="0">
+              <a:rPr lang="en-US" sz="1050" dirty="0">
                 <a:solidFill>
                   <a:srgbClr val="5B6370"/>
                 </a:solidFill>
@@ -12027,7 +12027,7 @@
               <a:t>Sahaj Kumar</a:t>
             </a:r>
             <a:r>
-              <a:rPr sz="1000" b="0" dirty="0">
+              <a:rPr sz="1050" b="0" dirty="0">
                 <a:solidFill>
                   <a:srgbClr val="5B6370"/>
                 </a:solidFill>
@@ -12036,7 +12036,7 @@
               <a:t> — Tools &amp; Security  |  </a:t>
             </a:r>
             <a:r>
-              <a:rPr lang="en-US" sz="1000" dirty="0">
+              <a:rPr lang="en-US" sz="1050" dirty="0">
                 <a:solidFill>
                   <a:srgbClr val="5B6370"/>
                 </a:solidFill>
@@ -12044,7 +12044,7 @@
               <a:t>Siddhant Asati</a:t>
             </a:r>
             <a:r>
-              <a:rPr sz="1000" b="0" dirty="0">
+              <a:rPr sz="1050" b="0" dirty="0">
                 <a:solidFill>
                   <a:srgbClr val="5B6370"/>
                 </a:solidFill>
@@ -12052,6 +12052,21 @@
               </a:rPr>
               <a:t> — Frontend, API &amp; Demo</a:t>
             </a:r>
+            <a:r>
+              <a:rPr lang="en-US" sz="1050" b="0" dirty="0">
+                <a:solidFill>
+                  <a:srgbClr val="5B6370"/>
+                </a:solidFill>
+                <a:latin typeface="Arial" panose="020B0604020202020204"/>
+              </a:rPr>
+              <a:t> | Amey Bondre – Improving UI/UX, PPT</a:t>
+            </a:r>
+            <a:endParaRPr sz="1050" b="0" dirty="0">
+              <a:solidFill>
+                <a:srgbClr val="5B6370"/>
+              </a:solidFill>
+              <a:latin typeface="Arial" panose="020B0604020202020204"/>
+            </a:endParaRPr>
           </a:p>
         </p:txBody>
       </p:sp>
